--- a/content/decks/media-studies/media-studies-s1-lesson-18-exam-rehearsal.pptx
+++ b/content/decks/media-studies/media-studies-s1-lesson-18-exam-rehearsal.pptx
@@ -16,9 +16,11 @@
     <p:sldId id="264" r:id="rId10"/>
     <p:sldId id="265" r:id="rId11"/>
     <p:sldId id="266" r:id="rId12"/>
+    <p:sldId id="267" r:id="rId13"/>
+    <p:sldId id="268" r:id="rId14"/>
   </p:sldIdLst>
   <p:notesMasterIdLst>
-    <p:notesMasterId r:id="rId13"/>
+    <p:notesMasterId r:id="rId15"/>
   </p:notesMasterIdLst>
   <p:sldSz cx="12192000" cy="6858000"/>
   <p:notesSz cx="6858000" cy="12192000"/>
@@ -512,7 +514,7 @@
           <a:p>
             <a:r>
               <a:rPr lang="en-US" dirty="0"/>
-              <a:t>The last teaching week is spent making the exam boring: no surprises left in format, timing, or the mark scheme's economics.</a:t>
+              <a:t>The last teaching week is spent making the exam boring: no surprises left in format, timing, or the mark scheme's economics. No Thursday session.</a:t>
             </a:r>
             <a:endParaRPr lang="en-US" dirty="0"/>
           </a:p>
@@ -600,7 +602,7 @@
           <a:p>
             <a:r>
               <a:rPr lang="en-US" dirty="0"/>
-              <a:t/>
+              <a:t>This is the debrief exemplar the plan names: the official annotated model reading. Students pick one line, read it aloud, and imitate its shape on their own extract sentence.</a:t>
             </a:r>
             <a:endParaRPr lang="en-US" dirty="0"/>
           </a:p>
@@ -688,7 +690,7 @@
           <a:p>
             <a:r>
               <a:rPr lang="en-US" dirty="0"/>
-              <a:t/>
+              <a:t>The two grids side by side end the assume-an-essay-is-marked-differently error. Point at the matching rows: concepts, contexts, terminology, analysis, examples.</a:t>
             </a:r>
             <a:endParaRPr lang="en-US" dirty="0"/>
           </a:p>
@@ -712,6 +714,182 @@
             <a:fld id="{F7021451-1387-4CA6-816F-3879F97B5CBC}" type="slidenum">
               <a:rPr lang="en-US"/>
               <a:t>11</a:t>
+            </a:fld>
+            <a:endParaRPr lang="en-US"/>
+          </a:p>
+        </p:txBody>
+      </p:sp>
+    </p:spTree>
+    <p:extLst>
+      <p:ext uri="{BB962C8B-B14F-4D97-AF65-F5344CB8AC3E}">
+        <p14:creationId xmlns:p14="http://schemas.microsoft.com/office/powerpoint/2010/main" val="1024086991"/>
+      </p:ext>
+    </p:extLst>
+  </p:cSld>
+  <p:clrMapOvr>
+    <a:masterClrMapping/>
+  </p:clrMapOvr>
+</p:notes>
+</file>
+
+<file path=ppt/notesSlides/notesSlide12.xml><?xml version="1.0" encoding="utf-8"?>
+<p:notes xmlns:a="http://schemas.openxmlformats.org/drawingml/2006/main" xmlns:r="http://schemas.openxmlformats.org/officeDocument/2006/relationships" xmlns:p="http://schemas.openxmlformats.org/presentationml/2006/main">
+  <p:cSld>
+    <p:spTree>
+      <p:nvGrpSpPr>
+        <p:cNvPr id="1" name=""/>
+        <p:cNvGrpSpPr/>
+        <p:nvPr/>
+      </p:nvGrpSpPr>
+      <p:grpSpPr>
+        <a:xfrm>
+          <a:off x="0" y="0"/>
+          <a:ext cx="0" cy="0"/>
+          <a:chOff x="0" y="0"/>
+          <a:chExt cx="0" cy="0"/>
+        </a:xfrm>
+      </p:grpSpPr>
+      <p:sp>
+        <p:nvSpPr>
+          <p:cNvPr id="2" name="Slide Image Placeholder 1"/>
+          <p:cNvSpPr>
+            <a:spLocks noGrp="1" noRot="1" noChangeAspect="1"/>
+          </p:cNvSpPr>
+          <p:nvPr>
+            <p:ph type="sldImg"/>
+          </p:nvPr>
+        </p:nvSpPr>
+        <p:spPr/>
+      </p:sp>
+      <p:sp>
+        <p:nvSpPr>
+          <p:cNvPr id="3" name="Notes Placeholder 2"/>
+          <p:cNvSpPr>
+            <a:spLocks noGrp="1"/>
+          </p:cNvSpPr>
+          <p:nvPr>
+            <p:ph type="body" idx="1"/>
+          </p:nvPr>
+        </p:nvSpPr>
+        <p:spPr/>
+        <p:txBody>
+          <a:bodyPr/>
+          <a:lstStyle/>
+          <a:p>
+            <a:r>
+              <a:rPr lang="en-US" dirty="0"/>
+              <a:t>CS13 sits Wednesday 6 January per the register, fed by HW2 which came due Monday. Peer-marked then moderated; comments in the WS 4.6 style.</a:t>
+            </a:r>
+            <a:endParaRPr lang="en-US" dirty="0"/>
+          </a:p>
+        </p:txBody>
+      </p:sp>
+      <p:sp>
+        <p:nvSpPr>
+          <p:cNvPr id="4" name="Slide Number Placeholder 3"/>
+          <p:cNvSpPr>
+            <a:spLocks noGrp="1"/>
+          </p:cNvSpPr>
+          <p:nvPr>
+            <p:ph type="sldNum" sz="quarter" idx="10"/>
+          </p:nvPr>
+        </p:nvSpPr>
+        <p:spPr/>
+        <p:txBody>
+          <a:bodyPr/>
+          <a:lstStyle/>
+          <a:p>
+            <a:fld id="{F7021451-1387-4CA6-816F-3879F97B5CBC}" type="slidenum">
+              <a:rPr lang="en-US"/>
+              <a:t>12</a:t>
+            </a:fld>
+            <a:endParaRPr lang="en-US"/>
+          </a:p>
+        </p:txBody>
+      </p:sp>
+    </p:spTree>
+    <p:extLst>
+      <p:ext uri="{BB962C8B-B14F-4D97-AF65-F5344CB8AC3E}">
+        <p14:creationId xmlns:p14="http://schemas.microsoft.com/office/powerpoint/2010/main" val="1024086991"/>
+      </p:ext>
+    </p:extLst>
+  </p:cSld>
+  <p:clrMapOvr>
+    <a:masterClrMapping/>
+  </p:clrMapOvr>
+</p:notes>
+</file>
+
+<file path=ppt/notesSlides/notesSlide13.xml><?xml version="1.0" encoding="utf-8"?>
+<p:notes xmlns:a="http://schemas.openxmlformats.org/drawingml/2006/main" xmlns:r="http://schemas.openxmlformats.org/officeDocument/2006/relationships" xmlns:p="http://schemas.openxmlformats.org/presentationml/2006/main">
+  <p:cSld>
+    <p:spTree>
+      <p:nvGrpSpPr>
+        <p:cNvPr id="1" name=""/>
+        <p:cNvGrpSpPr/>
+        <p:nvPr/>
+      </p:nvGrpSpPr>
+      <p:grpSpPr>
+        <a:xfrm>
+          <a:off x="0" y="0"/>
+          <a:ext cx="0" cy="0"/>
+          <a:chOff x="0" y="0"/>
+          <a:chExt cx="0" cy="0"/>
+        </a:xfrm>
+      </p:grpSpPr>
+      <p:sp>
+        <p:nvSpPr>
+          <p:cNvPr id="2" name="Slide Image Placeholder 1"/>
+          <p:cNvSpPr>
+            <a:spLocks noGrp="1" noRot="1" noChangeAspect="1"/>
+          </p:cNvSpPr>
+          <p:nvPr>
+            <p:ph type="sldImg"/>
+          </p:nvPr>
+        </p:nvSpPr>
+        <p:spPr/>
+      </p:sp>
+      <p:sp>
+        <p:nvSpPr>
+          <p:cNvPr id="3" name="Notes Placeholder 2"/>
+          <p:cNvSpPr>
+            <a:spLocks noGrp="1"/>
+          </p:cNvSpPr>
+          <p:nvPr>
+            <p:ph type="body" idx="1"/>
+          </p:nvPr>
+        </p:nvSpPr>
+        <p:spPr/>
+        <p:txBody>
+          <a:bodyPr/>
+          <a:lstStyle/>
+          <a:p>
+            <a:r>
+              <a:rPr lang="en-US" dirty="0"/>
+              <a:t/>
+            </a:r>
+            <a:endParaRPr lang="en-US" dirty="0"/>
+          </a:p>
+        </p:txBody>
+      </p:sp>
+      <p:sp>
+        <p:nvSpPr>
+          <p:cNvPr id="4" name="Slide Number Placeholder 3"/>
+          <p:cNvSpPr>
+            <a:spLocks noGrp="1"/>
+          </p:cNvSpPr>
+          <p:nvPr>
+            <p:ph type="sldNum" sz="quarter" idx="10"/>
+          </p:nvPr>
+        </p:nvSpPr>
+        <p:spPr/>
+        <p:txBody>
+          <a:bodyPr/>
+          <a:lstStyle/>
+          <a:p>
+            <a:fld id="{F7021451-1387-4CA6-816F-3879F97B5CBC}" type="slidenum">
+              <a:rPr lang="en-US"/>
+              <a:t>13</a:t>
             </a:fld>
             <a:endParaRPr lang="en-US"/>
           </a:p>
@@ -864,7 +1042,7 @@
           <a:p>
             <a:r>
               <a:rPr lang="en-US" dirty="0"/>
-              <a:t>Young musicians tuning and rehearsing. They practiced until the performance cost them nothing. That is the week's aim.</a:t>
+              <a:t>The room met this paper at L08 as the held rehearsal text and sat A1 on the same format. This week the full paper is walked end to end on the rubric's own clock: 30 viewing, 45 Section A, 45 Section B, the frozen stem read aloud. The June 2025 variants stay sealed for the S2 mocks.</a:t>
             </a:r>
             <a:endParaRPr lang="en-US" dirty="0"/>
           </a:p>
@@ -1040,7 +1218,7 @@
           <a:p>
             <a:r>
               <a:rPr lang="en-US" dirty="0"/>
-              <a:t/>
+              <a:t>Write your own minute budget inside each section: paragraphs, plan time, check time. A promise to Wednesday. The page on screen is the June 2024 paper's own wording; every sitting reuses the stem.</a:t>
             </a:r>
             <a:endParaRPr lang="en-US" dirty="0"/>
           </a:p>
@@ -1128,7 +1306,7 @@
           <a:p>
             <a:r>
               <a:rPr lang="en-US" dirty="0"/>
-              <a:t/>
+              <a:t>Round 1 is modelled: the teacher writes a five-minute plan on the board for one bank question, then photographs it as the exemplar for next year. Bank questions imitate the June 2024 Section B register.</a:t>
             </a:r>
             <a:endParaRPr lang="en-US" dirty="0"/>
           </a:p>
@@ -1216,7 +1394,7 @@
           <a:p>
             <a:r>
               <a:rPr lang="en-US" dirty="0"/>
-              <a:t/>
+              <a:t>Peer comments follow the WS 4.6 comment-bank style: tick-box rows plus one written action. The grid on screen is the June 2024 Section B page; its concepts criterion reads audience and industry, and its analysis criterion expects multiple case studies in the top bands, which is why one case study caps the band.</a:t>
             </a:r>
             <a:endParaRPr lang="en-US" dirty="0"/>
           </a:p>
@@ -1304,7 +1482,7 @@
           <a:p>
             <a:r>
               <a:rPr lang="en-US" dirty="0"/>
-              <a:t/>
+              <a:t>Best-fit per criterion, five criteria of five marks. The header strip is from the Section B pages of the June 2024 scheme; Section A prints the identical economy.</a:t>
             </a:r>
             <a:endParaRPr lang="en-US" dirty="0"/>
           </a:p>
@@ -1392,7 +1570,7 @@
           <a:p>
             <a:r>
               <a:rPr lang="en-US" dirty="0"/>
-              <a:t/>
+              <a:t>The card is personal calibration output from CS13 and the A4 review, written before the room leaves on Friday.</a:t>
             </a:r>
             <a:endParaRPr lang="en-US" dirty="0"/>
           </a:p>
@@ -2000,7 +2178,7 @@
                 <a:ea typeface="Arial" pitchFamily="34" charset="-122"/>
                 <a:cs typeface="Arial" pitchFamily="34" charset="-120"/>
               </a:rPr>
-              <a:t>Four days  ·  Monday 4 to Friday 8 January</a:t>
+              <a:t>Four days  ·  Mon 4 · Tue 5 · Wed 6 (double) · Fri 8 January</a:t>
             </a:r>
             <a:endParaRPr lang="en-US" sz="1300" dirty="0"/>
           </a:p>
@@ -2071,7 +2249,7 @@
                 <a:ea typeface="Arial" pitchFamily="34" charset="-122"/>
                 <a:cs typeface="Arial" pitchFamily="34" charset="-120"/>
               </a:rPr>
-              <a:t>DELIVERABLE · CS13</a:t>
+              <a:t>THE EXAMINER'S OWN SENTENCES</a:t>
             </a:r>
             <a:endParaRPr lang="en-US" sz="1100" dirty="0"/>
           </a:p>
@@ -2110,7 +2288,7 @@
                 <a:ea typeface="Arial" pitchFamily="34" charset="-122"/>
                 <a:cs typeface="Arial" pitchFamily="34" charset="-120"/>
               </a:rPr>
-              <a:t>WEDNESDAY, FULL DRESS</a:t>
+              <a:t>TECHNIQUE, THEN EFFECT, EVERY LINE</a:t>
             </a:r>
             <a:endParaRPr lang="en-US" sz="1100" dirty="0"/>
           </a:p>
@@ -2141,123 +2319,21 @@
       </p:sp>
       <p:sp>
         <p:nvSpPr>
-          <p:cNvPr id="5" name="Text 3"/>
-          <p:cNvSpPr/>
-          <p:nvPr/>
-        </p:nvSpPr>
-        <p:spPr>
-          <a:xfrm>
-            <a:off x="822960" y="1280160"/>
-            <a:ext cx="10543032" cy="914400"/>
-          </a:xfrm>
-          <a:prstGeom prst="rect">
-            <a:avLst/>
-          </a:prstGeom>
-          <a:noFill/>
-          <a:ln/>
-        </p:spPr>
-        <p:txBody>
-          <a:bodyPr wrap="square" lIns="0" tIns="0" rIns="0" bIns="0" rtlCol="0" anchor="ctr"/>
-          <a:lstStyle/>
-          <a:p>
-            <a:pPr indent="0" marL="0">
-              <a:buNone/>
-            </a:pPr>
-            <a:r>
-              <a:rPr lang="en-US" sz="3600" dirty="0">
-                <a:solidFill>
-                  <a:srgbClr val="24313F"/>
-                </a:solidFill>
-                <a:latin typeface="Georgia" pitchFamily="34" charset="0"/>
-                <a:ea typeface="Georgia" pitchFamily="34" charset="-122"/>
-                <a:cs typeface="Georgia" pitchFamily="34" charset="-120"/>
-              </a:rPr>
-              <a:t>Timed Section B, peer-marked</a:t>
-            </a:r>
-            <a:endParaRPr lang="en-US" sz="3600" dirty="0"/>
-          </a:p>
-        </p:txBody>
-      </p:sp>
-      <p:sp>
-        <p:nvSpPr>
-          <p:cNvPr id="6" name="Shape 4"/>
-          <p:cNvSpPr/>
-          <p:nvPr/>
-        </p:nvSpPr>
-        <p:spPr>
-          <a:xfrm>
-            <a:off x="822960" y="2514600"/>
-            <a:ext cx="914400" cy="0"/>
-          </a:xfrm>
-          <a:prstGeom prst="line">
-            <a:avLst/>
-          </a:prstGeom>
-          <a:noFill/>
-          <a:ln w="31750">
-            <a:solidFill>
-              <a:srgbClr val="8C3A38"/>
-            </a:solidFill>
-            <a:prstDash val="solid"/>
-          </a:ln>
-        </p:spPr>
-      </p:sp>
-      <p:sp>
-        <p:nvSpPr>
-          <p:cNvPr id="7" name="Text 5"/>
-          <p:cNvSpPr/>
-          <p:nvPr/>
-        </p:nvSpPr>
-        <p:spPr>
-          <a:xfrm>
-            <a:off x="822960" y="2743200"/>
-            <a:ext cx="9875520" cy="1920240"/>
-          </a:xfrm>
-          <a:prstGeom prst="rect">
-            <a:avLst/>
-          </a:prstGeom>
-          <a:noFill/>
-          <a:ln/>
-        </p:spPr>
-        <p:txBody>
-          <a:bodyPr wrap="square" lIns="0" tIns="0" rIns="0" bIns="0" rtlCol="0" anchor="t"/>
-          <a:lstStyle/>
-          <a:p>
-            <a:pPr indent="0" marL="0">
-              <a:lnSpc>
-                <a:spcPts val="2800"/>
-              </a:lnSpc>
-              <a:buNone/>
-            </a:pPr>
-            <a:r>
-              <a:rPr lang="en-US" sz="2000" dirty="0">
-                <a:solidFill>
-                  <a:srgbClr val="24313F"/>
-                </a:solidFill>
-                <a:latin typeface="Georgia" pitchFamily="34" charset="0"/>
-                <a:ea typeface="Georgia" pitchFamily="34" charset="-122"/>
-                <a:cs typeface="Georgia" pitchFamily="34" charset="-120"/>
-              </a:rPr>
-              <a:t>A 45-minute Section B on your own case studies, peer-marked as Beat the Examiner, full dress: the official rubric, then live moderation. The last teaching day ends on the success check, stated from memory: the full paper structure and the per-section minute budget. Then logistics, once, calmly: bring nothing but pens.</a:t>
-            </a:r>
-            <a:endParaRPr lang="en-US" sz="2000" dirty="0"/>
-          </a:p>
-        </p:txBody>
-      </p:sp>
-      <p:sp>
-        <p:nvSpPr>
-          <p:cNvPr id="8" name="Shape 6"/>
-          <p:cNvSpPr/>
-          <p:nvPr/>
-        </p:nvSpPr>
-        <p:spPr>
-          <a:xfrm>
-            <a:off x="822960" y="6382512"/>
-            <a:ext cx="10543032" cy="0"/>
-          </a:xfrm>
-          <a:prstGeom prst="line">
-            <a:avLst/>
-          </a:prstGeom>
-          <a:noFill/>
+          <p:cNvPr id="5" name="Shape 3"/>
+          <p:cNvSpPr/>
+          <p:nvPr/>
+        </p:nvSpPr>
+        <p:spPr>
+          <a:xfrm>
+            <a:off x="822960" y="1097280"/>
+            <a:ext cx="7315200" cy="4709160"/>
+          </a:xfrm>
+          <a:prstGeom prst="rect">
+            <a:avLst/>
+          </a:prstGeom>
+          <a:solidFill>
+            <a:srgbClr val="FAF8F1"/>
+          </a:solidFill>
           <a:ln w="9525">
             <a:solidFill>
               <a:srgbClr val="D9D4C4"/>
@@ -2266,15 +2342,39 @@
           </a:ln>
         </p:spPr>
       </p:sp>
-      <p:sp>
-        <p:nvSpPr>
-          <p:cNvPr id="9" name="Text 7"/>
-          <p:cNvSpPr/>
-          <p:nvPr/>
-        </p:nvSpPr>
-        <p:spPr>
-          <a:xfrm>
-            <a:off x="822960" y="6419088"/>
+      <p:pic>
+        <p:nvPicPr>
+          <p:cNvPr id="6" name="Image 0" descr="/Users/dogan/Documents/Vaults/Courses/wiki/classes/media-studies/decks/_build/img/ms21-p7.jpg">    </p:cNvPr>
+          <p:cNvPicPr>
+            <a:picLocks noChangeAspect="1"/>
+          </p:cNvPicPr>
+          <p:nvPr/>
+        </p:nvPicPr>
+        <p:blipFill>
+          <a:blip r:embed="rId1"/>
+          <a:stretch>
+            <a:fillRect/>
+          </a:stretch>
+        </p:blipFill>
+        <p:spPr>
+          <a:xfrm>
+            <a:off x="1331870" y="1225296"/>
+            <a:ext cx="6297380" cy="4453128"/>
+          </a:xfrm>
+          <a:prstGeom prst="rect">
+            <a:avLst/>
+          </a:prstGeom>
+        </p:spPr>
+      </p:pic>
+      <p:sp>
+        <p:nvSpPr>
+          <p:cNvPr id="7" name="Text 4"/>
+          <p:cNvSpPr/>
+          <p:nvPr/>
+        </p:nvSpPr>
+        <p:spPr>
+          <a:xfrm>
+            <a:off x="822960" y="5870448"/>
             <a:ext cx="7315200" cy="274320"/>
           </a:xfrm>
           <a:prstGeom prst="rect">
@@ -2287,11 +2387,11 @@
           <a:bodyPr wrap="square" lIns="0" tIns="0" rIns="0" bIns="0" rtlCol="0" anchor="ctr"/>
           <a:lstStyle/>
           <a:p>
-            <a:pPr indent="0" marL="0">
-              <a:buNone/>
-            </a:pPr>
-            <a:r>
-              <a:rPr lang="en-US" sz="900" spc="150" kern="0" dirty="0">
+            <a:pPr algn="ctr" indent="0" marL="0">
+              <a:buNone/>
+            </a:pPr>
+            <a:r>
+              <a:rPr lang="en-US" sz="1000" dirty="0">
                 <a:solidFill>
                   <a:srgbClr val="7A7F72"/>
                 </a:solidFill>
@@ -2299,22 +2399,22 @@
                 <a:ea typeface="Arial" pitchFamily="34" charset="-122"/>
                 <a:cs typeface="Arial" pitchFamily="34" charset="-120"/>
               </a:rPr>
-              <a:t>MEDIA STUDIES 9607 · SEMESTER I</a:t>
-            </a:r>
-            <a:endParaRPr lang="en-US" sz="900" dirty="0"/>
-          </a:p>
-        </p:txBody>
-      </p:sp>
-      <p:sp>
-        <p:nvSpPr>
-          <p:cNvPr id="10" name="Text 8"/>
-          <p:cNvSpPr/>
-          <p:nvPr/>
-        </p:nvSpPr>
-        <p:spPr>
-          <a:xfrm>
-            <a:off x="10268712" y="6355080"/>
-            <a:ext cx="1097280" cy="365760"/>
+              <a:t>June 2024 mark scheme, the Your Honor worked reading: movement, placement, focus, angle</a:t>
+            </a:r>
+            <a:endParaRPr lang="en-US" sz="1000" dirty="0"/>
+          </a:p>
+        </p:txBody>
+      </p:sp>
+      <p:sp>
+        <p:nvSpPr>
+          <p:cNvPr id="8" name="Text 5"/>
+          <p:cNvSpPr/>
+          <p:nvPr/>
+        </p:nvSpPr>
+        <p:spPr>
+          <a:xfrm>
+            <a:off x="8549640" y="1371600"/>
+            <a:ext cx="2834640" cy="822960"/>
           </a:xfrm>
           <a:prstGeom prst="rect">
             <a:avLst/>
@@ -2326,19 +2426,188 @@
           <a:bodyPr wrap="square" lIns="0" tIns="0" rIns="0" bIns="0" rtlCol="0" anchor="ctr"/>
           <a:lstStyle/>
           <a:p>
-            <a:pPr algn="r" indent="0" marL="0">
-              <a:buNone/>
-            </a:pPr>
-            <a:r>
-              <a:rPr lang="en-US" sz="1600" dirty="0">
-                <a:solidFill>
-                  <a:srgbClr val="A3C1AD"/>
+            <a:pPr indent="0" marL="0">
+              <a:lnSpc>
+                <a:spcPts val="2800"/>
+              </a:lnSpc>
+              <a:buNone/>
+            </a:pPr>
+            <a:r>
+              <a:rPr lang="en-US" sz="2400" dirty="0">
+                <a:solidFill>
+                  <a:srgbClr val="24313F"/>
                 </a:solidFill>
                 <a:latin typeface="Georgia" pitchFamily="34" charset="0"/>
                 <a:ea typeface="Georgia" pitchFamily="34" charset="-122"/>
                 <a:cs typeface="Georgia" pitchFamily="34" charset="-120"/>
               </a:rPr>
-              <a:t>05</a:t>
+              <a:t>Read one line aloud</a:t>
+            </a:r>
+            <a:endParaRPr lang="en-US" sz="2400" dirty="0"/>
+          </a:p>
+        </p:txBody>
+      </p:sp>
+      <p:sp>
+        <p:nvSpPr>
+          <p:cNvPr id="9" name="Shape 6"/>
+          <p:cNvSpPr/>
+          <p:nvPr/>
+        </p:nvSpPr>
+        <p:spPr>
+          <a:xfrm>
+            <a:off x="8549640" y="2286000"/>
+            <a:ext cx="2788920" cy="0"/>
+          </a:xfrm>
+          <a:prstGeom prst="line">
+            <a:avLst/>
+          </a:prstGeom>
+          <a:noFill/>
+          <a:ln w="9525">
+            <a:solidFill>
+              <a:srgbClr val="D9D4C4"/>
+            </a:solidFill>
+            <a:prstDash val="solid"/>
+          </a:ln>
+        </p:spPr>
+      </p:sp>
+      <p:sp>
+        <p:nvSpPr>
+          <p:cNvPr id="10" name="Text 7"/>
+          <p:cNvSpPr/>
+          <p:nvPr/>
+        </p:nvSpPr>
+        <p:spPr>
+          <a:xfrm>
+            <a:off x="8549640" y="2468880"/>
+            <a:ext cx="2834640" cy="3291840"/>
+          </a:xfrm>
+          <a:prstGeom prst="rect">
+            <a:avLst/>
+          </a:prstGeom>
+          <a:noFill/>
+          <a:ln/>
+        </p:spPr>
+        <p:txBody>
+          <a:bodyPr wrap="square" lIns="0" tIns="0" rIns="0" bIns="0" rtlCol="0" anchor="t"/>
+          <a:lstStyle/>
+          <a:p>
+            <a:pPr indent="0" marL="0">
+              <a:lnSpc>
+                <a:spcPts val="2000"/>
+              </a:lnSpc>
+              <a:buNone/>
+            </a:pPr>
+            <a:r>
+              <a:rPr lang="en-US" sz="1450" dirty="0">
+                <a:solidFill>
+                  <a:srgbClr val="24313F"/>
+                </a:solidFill>
+                <a:latin typeface="Georgia" pitchFamily="34" charset="0"/>
+                <a:ea typeface="Georgia" pitchFamily="34" charset="-122"/>
+                <a:cs typeface="Georgia" pitchFamily="34" charset="-120"/>
+              </a:rPr>
+              <a:t>Tilt up equals focus on Adam. Low angle equals who has the power. Every line of the examiners' reading pairs a technique with what it does. Your 'so that' clause is this page in miniature; write like the people who mark you.</a:t>
+            </a:r>
+            <a:endParaRPr lang="en-US" sz="1450" dirty="0"/>
+          </a:p>
+        </p:txBody>
+      </p:sp>
+      <p:sp>
+        <p:nvSpPr>
+          <p:cNvPr id="11" name="Shape 8"/>
+          <p:cNvSpPr/>
+          <p:nvPr/>
+        </p:nvSpPr>
+        <p:spPr>
+          <a:xfrm>
+            <a:off x="822960" y="6382512"/>
+            <a:ext cx="10543032" cy="0"/>
+          </a:xfrm>
+          <a:prstGeom prst="line">
+            <a:avLst/>
+          </a:prstGeom>
+          <a:noFill/>
+          <a:ln w="9525">
+            <a:solidFill>
+              <a:srgbClr val="D9D4C4"/>
+            </a:solidFill>
+            <a:prstDash val="solid"/>
+          </a:ln>
+        </p:spPr>
+      </p:sp>
+      <p:sp>
+        <p:nvSpPr>
+          <p:cNvPr id="12" name="Text 9"/>
+          <p:cNvSpPr/>
+          <p:nvPr/>
+        </p:nvSpPr>
+        <p:spPr>
+          <a:xfrm>
+            <a:off x="822960" y="6419088"/>
+            <a:ext cx="7315200" cy="274320"/>
+          </a:xfrm>
+          <a:prstGeom prst="rect">
+            <a:avLst/>
+          </a:prstGeom>
+          <a:noFill/>
+          <a:ln/>
+        </p:spPr>
+        <p:txBody>
+          <a:bodyPr wrap="square" lIns="0" tIns="0" rIns="0" bIns="0" rtlCol="0" anchor="ctr"/>
+          <a:lstStyle/>
+          <a:p>
+            <a:pPr indent="0" marL="0">
+              <a:buNone/>
+            </a:pPr>
+            <a:r>
+              <a:rPr lang="en-US" sz="900" spc="150" kern="0" dirty="0">
+                <a:solidFill>
+                  <a:srgbClr val="7A7F72"/>
+                </a:solidFill>
+                <a:latin typeface="Arial" pitchFamily="34" charset="0"/>
+                <a:ea typeface="Arial" pitchFamily="34" charset="-122"/>
+                <a:cs typeface="Arial" pitchFamily="34" charset="-120"/>
+              </a:rPr>
+              <a:t>MEDIA STUDIES 9607 · SEMESTER I</a:t>
+            </a:r>
+            <a:endParaRPr lang="en-US" sz="900" dirty="0"/>
+          </a:p>
+        </p:txBody>
+      </p:sp>
+      <p:sp>
+        <p:nvSpPr>
+          <p:cNvPr id="13" name="Text 10"/>
+          <p:cNvSpPr/>
+          <p:nvPr/>
+        </p:nvSpPr>
+        <p:spPr>
+          <a:xfrm>
+            <a:off x="10268712" y="6355080"/>
+            <a:ext cx="1097280" cy="365760"/>
+          </a:xfrm>
+          <a:prstGeom prst="rect">
+            <a:avLst/>
+          </a:prstGeom>
+          <a:noFill/>
+          <a:ln/>
+        </p:spPr>
+        <p:txBody>
+          <a:bodyPr wrap="square" lIns="0" tIns="0" rIns="0" bIns="0" rtlCol="0" anchor="ctr"/>
+          <a:lstStyle/>
+          <a:p>
+            <a:pPr algn="r" indent="0" marL="0">
+              <a:buNone/>
+            </a:pPr>
+            <a:r>
+              <a:rPr lang="en-US" sz="1600" dirty="0">
+                <a:solidFill>
+                  <a:srgbClr val="A3C1AD"/>
+                </a:solidFill>
+                <a:latin typeface="Georgia" pitchFamily="34" charset="0"/>
+                <a:ea typeface="Georgia" pitchFamily="34" charset="-122"/>
+                <a:cs typeface="Georgia" pitchFamily="34" charset="-120"/>
+              </a:rPr>
+              <a:t>06</a:t>
             </a:r>
             <a:endParaRPr lang="en-US" sz="1600" dirty="0"/>
           </a:p>
@@ -2355,6 +2624,904 @@
 <file path=ppt/slides/slide11.xml><?xml version="1.0" encoding="utf-8"?>
 <p:sld xmlns:a="http://schemas.openxmlformats.org/drawingml/2006/main" xmlns:r="http://schemas.openxmlformats.org/officeDocument/2006/relationships" xmlns:p="http://schemas.openxmlformats.org/presentationml/2006/main">
   <p:cSld name="Slide 11">
+    <p:bg>
+      <p:bgPr>
+        <a:solidFill>
+          <a:srgbClr val="FAF8F1"/>
+        </a:solidFill>
+      </p:bgPr>
+    </p:bg>
+    <p:spTree>
+      <p:nvGrpSpPr>
+        <p:cNvPr id="1" name=""/>
+        <p:cNvGrpSpPr/>
+        <p:nvPr/>
+      </p:nvGrpSpPr>
+      <p:grpSpPr>
+        <a:xfrm>
+          <a:off x="0" y="0"/>
+          <a:ext cx="0" cy="0"/>
+          <a:chOff x="0" y="0"/>
+          <a:chExt cx="0" cy="0"/>
+        </a:xfrm>
+      </p:grpSpPr>
+      <p:sp>
+        <p:nvSpPr>
+          <p:cNvPr id="2" name="Text 0"/>
+          <p:cNvSpPr/>
+          <p:nvPr/>
+        </p:nvSpPr>
+        <p:spPr>
+          <a:xfrm>
+            <a:off x="822960" y="457200"/>
+            <a:ext cx="6400800" cy="274320"/>
+          </a:xfrm>
+          <a:prstGeom prst="rect">
+            <a:avLst/>
+          </a:prstGeom>
+          <a:noFill/>
+          <a:ln/>
+        </p:spPr>
+        <p:txBody>
+          <a:bodyPr wrap="square" lIns="0" tIns="0" rIns="0" bIns="0" rtlCol="0" anchor="ctr"/>
+          <a:lstStyle/>
+          <a:p>
+            <a:pPr algn="l" indent="0" marL="0">
+              <a:buNone/>
+            </a:pPr>
+            <a:r>
+              <a:rPr lang="en-US" sz="1100" b="1" spc="250" kern="0" dirty="0">
+                <a:solidFill>
+                  <a:srgbClr val="4A6B5D"/>
+                </a:solidFill>
+                <a:latin typeface="Arial" pitchFamily="34" charset="0"/>
+                <a:ea typeface="Arial" pitchFamily="34" charset="-122"/>
+                <a:cs typeface="Arial" pitchFamily="34" charset="-120"/>
+              </a:rPr>
+              <a:t>SAME LADDER, DIFFERENT WORDS</a:t>
+            </a:r>
+            <a:endParaRPr lang="en-US" sz="1100" dirty="0"/>
+          </a:p>
+        </p:txBody>
+      </p:sp>
+      <p:sp>
+        <p:nvSpPr>
+          <p:cNvPr id="3" name="Text 1"/>
+          <p:cNvSpPr/>
+          <p:nvPr/>
+        </p:nvSpPr>
+        <p:spPr>
+          <a:xfrm>
+            <a:off x="6793992" y="457200"/>
+            <a:ext cx="4572000" cy="274320"/>
+          </a:xfrm>
+          <a:prstGeom prst="rect">
+            <a:avLst/>
+          </a:prstGeom>
+          <a:noFill/>
+          <a:ln/>
+        </p:spPr>
+        <p:txBody>
+          <a:bodyPr wrap="square" lIns="0" tIns="0" rIns="0" bIns="0" rtlCol="0" anchor="ctr"/>
+          <a:lstStyle/>
+          <a:p>
+            <a:pPr algn="r" indent="0" marL="0">
+              <a:buNone/>
+            </a:pPr>
+            <a:r>
+              <a:rPr lang="en-US" sz="1100" b="1" spc="250" kern="0" dirty="0">
+                <a:solidFill>
+                  <a:srgbClr val="7A7F72"/>
+                </a:solidFill>
+                <a:latin typeface="Arial" pitchFamily="34" charset="0"/>
+                <a:ea typeface="Arial" pitchFamily="34" charset="-122"/>
+                <a:cs typeface="Arial" pitchFamily="34" charset="-120"/>
+              </a:rPr>
+              <a:t>ONE ECONOMY, TWO VOCABULARIES</a:t>
+            </a:r>
+            <a:endParaRPr lang="en-US" sz="1100" dirty="0"/>
+          </a:p>
+        </p:txBody>
+      </p:sp>
+      <p:sp>
+        <p:nvSpPr>
+          <p:cNvPr id="4" name="Shape 2"/>
+          <p:cNvSpPr/>
+          <p:nvPr/>
+        </p:nvSpPr>
+        <p:spPr>
+          <a:xfrm>
+            <a:off x="822960" y="786384"/>
+            <a:ext cx="10543032" cy="0"/>
+          </a:xfrm>
+          <a:prstGeom prst="line">
+            <a:avLst/>
+          </a:prstGeom>
+          <a:noFill/>
+          <a:ln w="9525">
+            <a:solidFill>
+              <a:srgbClr val="D9D4C4"/>
+            </a:solidFill>
+            <a:prstDash val="solid"/>
+          </a:ln>
+        </p:spPr>
+      </p:sp>
+      <p:sp>
+        <p:nvSpPr>
+          <p:cNvPr id="5" name="Shape 3"/>
+          <p:cNvSpPr/>
+          <p:nvPr/>
+        </p:nvSpPr>
+        <p:spPr>
+          <a:xfrm>
+            <a:off x="822960" y="1188720"/>
+            <a:ext cx="5042916" cy="4160520"/>
+          </a:xfrm>
+          <a:prstGeom prst="rect">
+            <a:avLst/>
+          </a:prstGeom>
+          <a:solidFill>
+            <a:srgbClr val="FAF8F1"/>
+          </a:solidFill>
+          <a:ln w="9525">
+            <a:solidFill>
+              <a:srgbClr val="D9D4C4"/>
+            </a:solidFill>
+            <a:prstDash val="solid"/>
+          </a:ln>
+        </p:spPr>
+      </p:sp>
+      <p:pic>
+        <p:nvPicPr>
+          <p:cNvPr id="6" name="Image 0" descr="/Users/dogan/Documents/Vaults/Courses/wiki/classes/media-studies/decks/_build/img/ms21-p10.jpg">    </p:cNvPr>
+          <p:cNvPicPr>
+            <a:picLocks noChangeAspect="1"/>
+          </p:cNvPicPr>
+          <p:nvPr/>
+        </p:nvPicPr>
+        <p:blipFill>
+          <a:blip r:embed="rId1"/>
+          <a:stretch>
+            <a:fillRect/>
+          </a:stretch>
+        </p:blipFill>
+        <p:spPr>
+          <a:xfrm>
+            <a:off x="950976" y="1576482"/>
+            <a:ext cx="4786884" cy="3384996"/>
+          </a:xfrm>
+          <a:prstGeom prst="rect">
+            <a:avLst/>
+          </a:prstGeom>
+        </p:spPr>
+      </p:pic>
+      <p:sp>
+        <p:nvSpPr>
+          <p:cNvPr id="7" name="Shape 4"/>
+          <p:cNvSpPr/>
+          <p:nvPr/>
+        </p:nvSpPr>
+        <p:spPr>
+          <a:xfrm>
+            <a:off x="6323076" y="1188720"/>
+            <a:ext cx="5042916" cy="4160520"/>
+          </a:xfrm>
+          <a:prstGeom prst="rect">
+            <a:avLst/>
+          </a:prstGeom>
+          <a:solidFill>
+            <a:srgbClr val="FAF8F1"/>
+          </a:solidFill>
+          <a:ln w="9525">
+            <a:solidFill>
+              <a:srgbClr val="D9D4C4"/>
+            </a:solidFill>
+            <a:prstDash val="solid"/>
+          </a:ln>
+        </p:spPr>
+      </p:sp>
+      <p:pic>
+        <p:nvPicPr>
+          <p:cNvPr id="8" name="Image 1" descr="/Users/dogan/Documents/Vaults/Courses/wiki/classes/media-studies/decks/_build/img/ms21-p16.jpg">    </p:cNvPr>
+          <p:cNvPicPr>
+            <a:picLocks noChangeAspect="1"/>
+          </p:cNvPicPr>
+          <p:nvPr/>
+        </p:nvPicPr>
+        <p:blipFill>
+          <a:blip r:embed="rId2"/>
+          <a:stretch>
+            <a:fillRect/>
+          </a:stretch>
+        </p:blipFill>
+        <p:spPr>
+          <a:xfrm>
+            <a:off x="6451092" y="1576482"/>
+            <a:ext cx="4786884" cy="3384996"/>
+          </a:xfrm>
+          <a:prstGeom prst="rect">
+            <a:avLst/>
+          </a:prstGeom>
+        </p:spPr>
+      </p:pic>
+      <p:sp>
+        <p:nvSpPr>
+          <p:cNvPr id="9" name="Text 5"/>
+          <p:cNvSpPr/>
+          <p:nvPr/>
+        </p:nvSpPr>
+        <p:spPr>
+          <a:xfrm>
+            <a:off x="822960" y="5394960"/>
+            <a:ext cx="5042916" cy="320040"/>
+          </a:xfrm>
+          <a:prstGeom prst="rect">
+            <a:avLst/>
+          </a:prstGeom>
+          <a:noFill/>
+          <a:ln/>
+        </p:spPr>
+        <p:txBody>
+          <a:bodyPr wrap="square" lIns="0" tIns="0" rIns="0" bIns="0" rtlCol="0" anchor="ctr"/>
+          <a:lstStyle/>
+          <a:p>
+            <a:pPr algn="ctr" indent="0" marL="0">
+              <a:buNone/>
+            </a:pPr>
+            <a:r>
+              <a:rPr lang="en-US" sz="1050" dirty="0">
+                <a:solidFill>
+                  <a:srgbClr val="7A7F72"/>
+                </a:solidFill>
+                <a:latin typeface="Arial" pitchFamily="34" charset="0"/>
+                <a:ea typeface="Arial" pitchFamily="34" charset="-122"/>
+                <a:cs typeface="Arial" pitchFamily="34" charset="-120"/>
+              </a:rPr>
+              <a:t>Section A: language and representation, of the extract</a:t>
+            </a:r>
+            <a:endParaRPr lang="en-US" sz="1050" dirty="0"/>
+          </a:p>
+        </p:txBody>
+      </p:sp>
+      <p:sp>
+        <p:nvSpPr>
+          <p:cNvPr id="10" name="Text 6"/>
+          <p:cNvSpPr/>
+          <p:nvPr/>
+        </p:nvSpPr>
+        <p:spPr>
+          <a:xfrm>
+            <a:off x="6323076" y="5394960"/>
+            <a:ext cx="5042916" cy="320040"/>
+          </a:xfrm>
+          <a:prstGeom prst="rect">
+            <a:avLst/>
+          </a:prstGeom>
+          <a:noFill/>
+          <a:ln/>
+        </p:spPr>
+        <p:txBody>
+          <a:bodyPr wrap="square" lIns="0" tIns="0" rIns="0" bIns="0" rtlCol="0" anchor="ctr"/>
+          <a:lstStyle/>
+          <a:p>
+            <a:pPr algn="ctr" indent="0" marL="0">
+              <a:buNone/>
+            </a:pPr>
+            <a:r>
+              <a:rPr lang="en-US" sz="1050" dirty="0">
+                <a:solidFill>
+                  <a:srgbClr val="7A7F72"/>
+                </a:solidFill>
+                <a:latin typeface="Arial" pitchFamily="34" charset="0"/>
+                <a:ea typeface="Arial" pitchFamily="34" charset="-122"/>
+                <a:cs typeface="Arial" pitchFamily="34" charset="-120"/>
+              </a:rPr>
+              <a:t>Section B: audience and industry, from multiple case studies</a:t>
+            </a:r>
+            <a:endParaRPr lang="en-US" sz="1050" dirty="0"/>
+          </a:p>
+        </p:txBody>
+      </p:sp>
+      <p:sp>
+        <p:nvSpPr>
+          <p:cNvPr id="11" name="Shape 7"/>
+          <p:cNvSpPr/>
+          <p:nvPr/>
+        </p:nvSpPr>
+        <p:spPr>
+          <a:xfrm>
+            <a:off x="822960" y="5806440"/>
+            <a:ext cx="914400" cy="0"/>
+          </a:xfrm>
+          <a:prstGeom prst="line">
+            <a:avLst/>
+          </a:prstGeom>
+          <a:noFill/>
+          <a:ln w="31750">
+            <a:solidFill>
+              <a:srgbClr val="8C3A38"/>
+            </a:solidFill>
+            <a:prstDash val="solid"/>
+          </a:ln>
+        </p:spPr>
+      </p:sp>
+      <p:sp>
+        <p:nvSpPr>
+          <p:cNvPr id="12" name="Text 8"/>
+          <p:cNvSpPr/>
+          <p:nvPr/>
+        </p:nvSpPr>
+        <p:spPr>
+          <a:xfrm>
+            <a:off x="822960" y="5943600"/>
+            <a:ext cx="10543032" cy="411480"/>
+          </a:xfrm>
+          <a:prstGeom prst="rect">
+            <a:avLst/>
+          </a:prstGeom>
+          <a:noFill/>
+          <a:ln/>
+        </p:spPr>
+        <p:txBody>
+          <a:bodyPr wrap="square" lIns="0" tIns="0" rIns="0" bIns="0" rtlCol="0" anchor="ctr"/>
+          <a:lstStyle/>
+          <a:p>
+            <a:pPr indent="0" marL="0">
+              <a:buNone/>
+            </a:pPr>
+            <a:r>
+              <a:rPr lang="en-US" sz="1350" i="1" dirty="0">
+                <a:solidFill>
+                  <a:srgbClr val="4A6B5D"/>
+                </a:solidFill>
+                <a:latin typeface="Georgia" pitchFamily="34" charset="0"/>
+                <a:ea typeface="Georgia" pitchFamily="34" charset="-122"/>
+                <a:cs typeface="Georgia" pitchFamily="34" charset="-120"/>
+              </a:rPr>
+              <a:t>An essay is not marked by different rules, only in different words. Anyone who assumes Section B is a free-form essay gives away the same five criteria twice.</a:t>
+            </a:r>
+            <a:endParaRPr lang="en-US" sz="1350" dirty="0"/>
+          </a:p>
+        </p:txBody>
+      </p:sp>
+      <p:sp>
+        <p:nvSpPr>
+          <p:cNvPr id="13" name="Shape 9"/>
+          <p:cNvSpPr/>
+          <p:nvPr/>
+        </p:nvSpPr>
+        <p:spPr>
+          <a:xfrm>
+            <a:off x="822960" y="6382512"/>
+            <a:ext cx="10543032" cy="0"/>
+          </a:xfrm>
+          <a:prstGeom prst="line">
+            <a:avLst/>
+          </a:prstGeom>
+          <a:noFill/>
+          <a:ln w="9525">
+            <a:solidFill>
+              <a:srgbClr val="D9D4C4"/>
+            </a:solidFill>
+            <a:prstDash val="solid"/>
+          </a:ln>
+        </p:spPr>
+      </p:sp>
+      <p:sp>
+        <p:nvSpPr>
+          <p:cNvPr id="14" name="Text 10"/>
+          <p:cNvSpPr/>
+          <p:nvPr/>
+        </p:nvSpPr>
+        <p:spPr>
+          <a:xfrm>
+            <a:off x="822960" y="6419088"/>
+            <a:ext cx="7315200" cy="274320"/>
+          </a:xfrm>
+          <a:prstGeom prst="rect">
+            <a:avLst/>
+          </a:prstGeom>
+          <a:noFill/>
+          <a:ln/>
+        </p:spPr>
+        <p:txBody>
+          <a:bodyPr wrap="square" lIns="0" tIns="0" rIns="0" bIns="0" rtlCol="0" anchor="ctr"/>
+          <a:lstStyle/>
+          <a:p>
+            <a:pPr indent="0" marL="0">
+              <a:buNone/>
+            </a:pPr>
+            <a:r>
+              <a:rPr lang="en-US" sz="900" spc="150" kern="0" dirty="0">
+                <a:solidFill>
+                  <a:srgbClr val="7A7F72"/>
+                </a:solidFill>
+                <a:latin typeface="Arial" pitchFamily="34" charset="0"/>
+                <a:ea typeface="Arial" pitchFamily="34" charset="-122"/>
+                <a:cs typeface="Arial" pitchFamily="34" charset="-120"/>
+              </a:rPr>
+              <a:t>MEDIA STUDIES 9607 · SEMESTER I</a:t>
+            </a:r>
+            <a:endParaRPr lang="en-US" sz="900" dirty="0"/>
+          </a:p>
+        </p:txBody>
+      </p:sp>
+      <p:sp>
+        <p:nvSpPr>
+          <p:cNvPr id="15" name="Text 11"/>
+          <p:cNvSpPr/>
+          <p:nvPr/>
+        </p:nvSpPr>
+        <p:spPr>
+          <a:xfrm>
+            <a:off x="10268712" y="6355080"/>
+            <a:ext cx="1097280" cy="365760"/>
+          </a:xfrm>
+          <a:prstGeom prst="rect">
+            <a:avLst/>
+          </a:prstGeom>
+          <a:noFill/>
+          <a:ln/>
+        </p:spPr>
+        <p:txBody>
+          <a:bodyPr wrap="square" lIns="0" tIns="0" rIns="0" bIns="0" rtlCol="0" anchor="ctr"/>
+          <a:lstStyle/>
+          <a:p>
+            <a:pPr algn="r" indent="0" marL="0">
+              <a:buNone/>
+            </a:pPr>
+            <a:r>
+              <a:rPr lang="en-US" sz="1600" dirty="0">
+                <a:solidFill>
+                  <a:srgbClr val="A3C1AD"/>
+                </a:solidFill>
+                <a:latin typeface="Georgia" pitchFamily="34" charset="0"/>
+                <a:ea typeface="Georgia" pitchFamily="34" charset="-122"/>
+                <a:cs typeface="Georgia" pitchFamily="34" charset="-120"/>
+              </a:rPr>
+              <a:t>07</a:t>
+            </a:r>
+            <a:endParaRPr lang="en-US" sz="1600" dirty="0"/>
+          </a:p>
+        </p:txBody>
+      </p:sp>
+    </p:spTree>
+  </p:cSld>
+  <p:clrMapOvr>
+    <a:masterClrMapping/>
+  </p:clrMapOvr>
+</p:sld>
+</file>
+
+<file path=ppt/slides/slide12.xml><?xml version="1.0" encoding="utf-8"?>
+<p:sld xmlns:a="http://schemas.openxmlformats.org/drawingml/2006/main" xmlns:r="http://schemas.openxmlformats.org/officeDocument/2006/relationships" xmlns:p="http://schemas.openxmlformats.org/presentationml/2006/main">
+  <p:cSld name="Slide 12">
+    <p:bg>
+      <p:bgPr>
+        <a:solidFill>
+          <a:srgbClr val="FAF8F1"/>
+        </a:solidFill>
+      </p:bgPr>
+    </p:bg>
+    <p:spTree>
+      <p:nvGrpSpPr>
+        <p:cNvPr id="1" name=""/>
+        <p:cNvGrpSpPr/>
+        <p:nvPr/>
+      </p:nvGrpSpPr>
+      <p:grpSpPr>
+        <a:xfrm>
+          <a:off x="0" y="0"/>
+          <a:ext cx="0" cy="0"/>
+          <a:chOff x="0" y="0"/>
+          <a:chExt cx="0" cy="0"/>
+        </a:xfrm>
+      </p:grpSpPr>
+      <p:sp>
+        <p:nvSpPr>
+          <p:cNvPr id="2" name="Text 0"/>
+          <p:cNvSpPr/>
+          <p:nvPr/>
+        </p:nvSpPr>
+        <p:spPr>
+          <a:xfrm>
+            <a:off x="822960" y="457200"/>
+            <a:ext cx="6400800" cy="274320"/>
+          </a:xfrm>
+          <a:prstGeom prst="rect">
+            <a:avLst/>
+          </a:prstGeom>
+          <a:noFill/>
+          <a:ln/>
+        </p:spPr>
+        <p:txBody>
+          <a:bodyPr wrap="square" lIns="0" tIns="0" rIns="0" bIns="0" rtlCol="0" anchor="ctr"/>
+          <a:lstStyle/>
+          <a:p>
+            <a:pPr algn="l" indent="0" marL="0">
+              <a:buNone/>
+            </a:pPr>
+            <a:r>
+              <a:rPr lang="en-US" sz="1100" b="1" spc="250" kern="0" dirty="0">
+                <a:solidFill>
+                  <a:srgbClr val="4A6B5D"/>
+                </a:solidFill>
+                <a:latin typeface="Arial" pitchFamily="34" charset="0"/>
+                <a:ea typeface="Arial" pitchFamily="34" charset="-122"/>
+                <a:cs typeface="Arial" pitchFamily="34" charset="-120"/>
+              </a:rPr>
+              <a:t>DELIVERABLE · CS13</a:t>
+            </a:r>
+            <a:endParaRPr lang="en-US" sz="1100" dirty="0"/>
+          </a:p>
+        </p:txBody>
+      </p:sp>
+      <p:sp>
+        <p:nvSpPr>
+          <p:cNvPr id="3" name="Text 1"/>
+          <p:cNvSpPr/>
+          <p:nvPr/>
+        </p:nvSpPr>
+        <p:spPr>
+          <a:xfrm>
+            <a:off x="6793992" y="457200"/>
+            <a:ext cx="4572000" cy="274320"/>
+          </a:xfrm>
+          <a:prstGeom prst="rect">
+            <a:avLst/>
+          </a:prstGeom>
+          <a:noFill/>
+          <a:ln/>
+        </p:spPr>
+        <p:txBody>
+          <a:bodyPr wrap="square" lIns="0" tIns="0" rIns="0" bIns="0" rtlCol="0" anchor="ctr"/>
+          <a:lstStyle/>
+          <a:p>
+            <a:pPr algn="r" indent="0" marL="0">
+              <a:buNone/>
+            </a:pPr>
+            <a:r>
+              <a:rPr lang="en-US" sz="1100" b="1" spc="250" kern="0" dirty="0">
+                <a:solidFill>
+                  <a:srgbClr val="7A7F72"/>
+                </a:solidFill>
+                <a:latin typeface="Arial" pitchFamily="34" charset="0"/>
+                <a:ea typeface="Arial" pitchFamily="34" charset="-122"/>
+                <a:cs typeface="Arial" pitchFamily="34" charset="-120"/>
+              </a:rPr>
+              <a:t>WEDNESDAY, FULL DRESS</a:t>
+            </a:r>
+            <a:endParaRPr lang="en-US" sz="1100" dirty="0"/>
+          </a:p>
+        </p:txBody>
+      </p:sp>
+      <p:sp>
+        <p:nvSpPr>
+          <p:cNvPr id="4" name="Shape 2"/>
+          <p:cNvSpPr/>
+          <p:nvPr/>
+        </p:nvSpPr>
+        <p:spPr>
+          <a:xfrm>
+            <a:off x="822960" y="786384"/>
+            <a:ext cx="10543032" cy="0"/>
+          </a:xfrm>
+          <a:prstGeom prst="line">
+            <a:avLst/>
+          </a:prstGeom>
+          <a:noFill/>
+          <a:ln w="9525">
+            <a:solidFill>
+              <a:srgbClr val="D9D4C4"/>
+            </a:solidFill>
+            <a:prstDash val="solid"/>
+          </a:ln>
+        </p:spPr>
+      </p:sp>
+      <p:sp>
+        <p:nvSpPr>
+          <p:cNvPr id="5" name="Text 3"/>
+          <p:cNvSpPr/>
+          <p:nvPr/>
+        </p:nvSpPr>
+        <p:spPr>
+          <a:xfrm>
+            <a:off x="822960" y="1051560"/>
+            <a:ext cx="10543032" cy="731520"/>
+          </a:xfrm>
+          <a:prstGeom prst="rect">
+            <a:avLst/>
+          </a:prstGeom>
+          <a:noFill/>
+          <a:ln/>
+        </p:spPr>
+        <p:txBody>
+          <a:bodyPr wrap="square" lIns="0" tIns="0" rIns="0" bIns="0" rtlCol="0" anchor="ctr"/>
+          <a:lstStyle/>
+          <a:p>
+            <a:pPr indent="0" marL="0">
+              <a:buNone/>
+            </a:pPr>
+            <a:r>
+              <a:rPr lang="en-US" sz="3400" dirty="0">
+                <a:solidFill>
+                  <a:srgbClr val="24313F"/>
+                </a:solidFill>
+                <a:latin typeface="Georgia" pitchFamily="34" charset="0"/>
+                <a:ea typeface="Georgia" pitchFamily="34" charset="-122"/>
+                <a:cs typeface="Georgia" pitchFamily="34" charset="-120"/>
+              </a:rPr>
+              <a:t>Timed Section B, peer-marked</a:t>
+            </a:r>
+            <a:endParaRPr lang="en-US" sz="3400" dirty="0"/>
+          </a:p>
+        </p:txBody>
+      </p:sp>
+      <p:sp>
+        <p:nvSpPr>
+          <p:cNvPr id="6" name="Shape 4"/>
+          <p:cNvSpPr/>
+          <p:nvPr/>
+        </p:nvSpPr>
+        <p:spPr>
+          <a:xfrm>
+            <a:off x="822960" y="1965960"/>
+            <a:ext cx="914400" cy="0"/>
+          </a:xfrm>
+          <a:prstGeom prst="line">
+            <a:avLst/>
+          </a:prstGeom>
+          <a:noFill/>
+          <a:ln w="31750">
+            <a:solidFill>
+              <a:srgbClr val="8C3A38"/>
+            </a:solidFill>
+            <a:prstDash val="solid"/>
+          </a:ln>
+        </p:spPr>
+      </p:sp>
+      <p:sp>
+        <p:nvSpPr>
+          <p:cNvPr id="7" name="Text 5"/>
+          <p:cNvSpPr/>
+          <p:nvPr/>
+        </p:nvSpPr>
+        <p:spPr>
+          <a:xfrm>
+            <a:off x="822960" y="2194560"/>
+            <a:ext cx="9966960" cy="1737360"/>
+          </a:xfrm>
+          <a:prstGeom prst="rect">
+            <a:avLst/>
+          </a:prstGeom>
+          <a:noFill/>
+          <a:ln/>
+        </p:spPr>
+        <p:txBody>
+          <a:bodyPr wrap="square" lIns="0" tIns="0" rIns="0" bIns="0" rtlCol="0" anchor="t"/>
+          <a:lstStyle/>
+          <a:p>
+            <a:pPr indent="0" marL="0">
+              <a:lnSpc>
+                <a:spcPts val="2500"/>
+              </a:lnSpc>
+              <a:buNone/>
+            </a:pPr>
+            <a:r>
+              <a:rPr lang="en-US" sz="1800" dirty="0">
+                <a:solidFill>
+                  <a:srgbClr val="24313F"/>
+                </a:solidFill>
+                <a:latin typeface="Georgia" pitchFamily="34" charset="0"/>
+                <a:ea typeface="Georgia" pitchFamily="34" charset="-122"/>
+                <a:cs typeface="Georgia" pitchFamily="34" charset="-120"/>
+              </a:rPr>
+              <a:t>A 45-minute Section B on your own case studies, peer-marked as Beat the Examiner, full dress: the official rubric, then live moderation. The last teaching day ends on the success check, stated from memory: the full paper structure and the per-section minute budget. Then logistics, once, calmly: bring nothing but pens.</a:t>
+            </a:r>
+            <a:endParaRPr lang="en-US" sz="1800" dirty="0"/>
+          </a:p>
+        </p:txBody>
+      </p:sp>
+      <p:sp>
+        <p:nvSpPr>
+          <p:cNvPr id="8" name="Shape 6"/>
+          <p:cNvSpPr/>
+          <p:nvPr/>
+        </p:nvSpPr>
+        <p:spPr>
+          <a:xfrm>
+            <a:off x="822960" y="4069080"/>
+            <a:ext cx="10543032" cy="1828800"/>
+          </a:xfrm>
+          <a:prstGeom prst="rect">
+            <a:avLst/>
+          </a:prstGeom>
+          <a:solidFill>
+            <a:srgbClr val="FAF8F1"/>
+          </a:solidFill>
+          <a:ln w="9525">
+            <a:solidFill>
+              <a:srgbClr val="D9D4C4"/>
+            </a:solidFill>
+            <a:prstDash val="solid"/>
+          </a:ln>
+        </p:spPr>
+      </p:sp>
+      <p:pic>
+        <p:nvPicPr>
+          <p:cNvPr id="9" name="Image 0" descr="/Users/dogan/Documents/Vaults/Courses/wiki/classes/media-studies/decks/_build/img/qp21-sectionb.jpg">    </p:cNvPr>
+          <p:cNvPicPr>
+            <a:picLocks noChangeAspect="1"/>
+          </p:cNvPicPr>
+          <p:nvPr/>
+        </p:nvPicPr>
+        <p:blipFill>
+          <a:blip r:embed="rId1"/>
+          <a:stretch>
+            <a:fillRect/>
+          </a:stretch>
+        </p:blipFill>
+        <p:spPr>
+          <a:xfrm>
+            <a:off x="4096265" y="4197096"/>
+            <a:ext cx="3996423" cy="1572768"/>
+          </a:xfrm>
+          <a:prstGeom prst="rect">
+            <a:avLst/>
+          </a:prstGeom>
+        </p:spPr>
+      </p:pic>
+      <p:sp>
+        <p:nvSpPr>
+          <p:cNvPr id="10" name="Text 7"/>
+          <p:cNvSpPr/>
+          <p:nvPr/>
+        </p:nvSpPr>
+        <p:spPr>
+          <a:xfrm>
+            <a:off x="822960" y="5943600"/>
+            <a:ext cx="10543032" cy="274320"/>
+          </a:xfrm>
+          <a:prstGeom prst="rect">
+            <a:avLst/>
+          </a:prstGeom>
+          <a:noFill/>
+          <a:ln/>
+        </p:spPr>
+        <p:txBody>
+          <a:bodyPr wrap="square" lIns="0" tIns="0" rIns="0" bIns="0" rtlCol="0" anchor="ctr"/>
+          <a:lstStyle/>
+          <a:p>
+            <a:pPr algn="ctr" indent="0" marL="0">
+              <a:buNone/>
+            </a:pPr>
+            <a:r>
+              <a:rPr lang="en-US" sz="1050" dirty="0">
+                <a:solidFill>
+                  <a:srgbClr val="7A7F72"/>
+                </a:solidFill>
+                <a:latin typeface="Arial" pitchFamily="34" charset="0"/>
+                <a:ea typeface="Arial" pitchFamily="34" charset="-122"/>
+                <a:cs typeface="Arial" pitchFamily="34" charset="-120"/>
+              </a:rPr>
+              <a:t>The register the bank imitates: June 2024, Section B</a:t>
+            </a:r>
+            <a:endParaRPr lang="en-US" sz="1050" dirty="0"/>
+          </a:p>
+        </p:txBody>
+      </p:sp>
+      <p:sp>
+        <p:nvSpPr>
+          <p:cNvPr id="11" name="Shape 8"/>
+          <p:cNvSpPr/>
+          <p:nvPr/>
+        </p:nvSpPr>
+        <p:spPr>
+          <a:xfrm>
+            <a:off x="822960" y="6382512"/>
+            <a:ext cx="10543032" cy="0"/>
+          </a:xfrm>
+          <a:prstGeom prst="line">
+            <a:avLst/>
+          </a:prstGeom>
+          <a:noFill/>
+          <a:ln w="9525">
+            <a:solidFill>
+              <a:srgbClr val="D9D4C4"/>
+            </a:solidFill>
+            <a:prstDash val="solid"/>
+          </a:ln>
+        </p:spPr>
+      </p:sp>
+      <p:sp>
+        <p:nvSpPr>
+          <p:cNvPr id="12" name="Text 9"/>
+          <p:cNvSpPr/>
+          <p:nvPr/>
+        </p:nvSpPr>
+        <p:spPr>
+          <a:xfrm>
+            <a:off x="822960" y="6419088"/>
+            <a:ext cx="7315200" cy="274320"/>
+          </a:xfrm>
+          <a:prstGeom prst="rect">
+            <a:avLst/>
+          </a:prstGeom>
+          <a:noFill/>
+          <a:ln/>
+        </p:spPr>
+        <p:txBody>
+          <a:bodyPr wrap="square" lIns="0" tIns="0" rIns="0" bIns="0" rtlCol="0" anchor="ctr"/>
+          <a:lstStyle/>
+          <a:p>
+            <a:pPr indent="0" marL="0">
+              <a:buNone/>
+            </a:pPr>
+            <a:r>
+              <a:rPr lang="en-US" sz="900" spc="150" kern="0" dirty="0">
+                <a:solidFill>
+                  <a:srgbClr val="7A7F72"/>
+                </a:solidFill>
+                <a:latin typeface="Arial" pitchFamily="34" charset="0"/>
+                <a:ea typeface="Arial" pitchFamily="34" charset="-122"/>
+                <a:cs typeface="Arial" pitchFamily="34" charset="-120"/>
+              </a:rPr>
+              <a:t>MEDIA STUDIES 9607 · SEMESTER I</a:t>
+            </a:r>
+            <a:endParaRPr lang="en-US" sz="900" dirty="0"/>
+          </a:p>
+        </p:txBody>
+      </p:sp>
+      <p:sp>
+        <p:nvSpPr>
+          <p:cNvPr id="13" name="Text 10"/>
+          <p:cNvSpPr/>
+          <p:nvPr/>
+        </p:nvSpPr>
+        <p:spPr>
+          <a:xfrm>
+            <a:off x="10268712" y="6355080"/>
+            <a:ext cx="1097280" cy="365760"/>
+          </a:xfrm>
+          <a:prstGeom prst="rect">
+            <a:avLst/>
+          </a:prstGeom>
+          <a:noFill/>
+          <a:ln/>
+        </p:spPr>
+        <p:txBody>
+          <a:bodyPr wrap="square" lIns="0" tIns="0" rIns="0" bIns="0" rtlCol="0" anchor="ctr"/>
+          <a:lstStyle/>
+          <a:p>
+            <a:pPr algn="r" indent="0" marL="0">
+              <a:buNone/>
+            </a:pPr>
+            <a:r>
+              <a:rPr lang="en-US" sz="1600" dirty="0">
+                <a:solidFill>
+                  <a:srgbClr val="A3C1AD"/>
+                </a:solidFill>
+                <a:latin typeface="Georgia" pitchFamily="34" charset="0"/>
+                <a:ea typeface="Georgia" pitchFamily="34" charset="-122"/>
+                <a:cs typeface="Georgia" pitchFamily="34" charset="-120"/>
+              </a:rPr>
+              <a:t>08</a:t>
+            </a:r>
+            <a:endParaRPr lang="en-US" sz="1600" dirty="0"/>
+          </a:p>
+        </p:txBody>
+      </p:sp>
+    </p:spTree>
+  </p:cSld>
+  <p:clrMapOvr>
+    <a:masterClrMapping/>
+  </p:clrMapOvr>
+</p:sld>
+</file>
+
+<file path=ppt/slides/slide13.xml><?xml version="1.0" encoding="utf-8"?>
+<p:sld xmlns:a="http://schemas.openxmlformats.org/drawingml/2006/main" xmlns:r="http://schemas.openxmlformats.org/officeDocument/2006/relationships" xmlns:p="http://schemas.openxmlformats.org/presentationml/2006/main">
+  <p:cSld name="Slide 13">
     <p:bg>
       <p:bgPr>
         <a:solidFill>
@@ -2634,7 +3801,7 @@
                 <a:ea typeface="Georgia" pitchFamily="34" charset="-122"/>
                 <a:cs typeface="Georgia" pitchFamily="34" charset="-120"/>
               </a:rPr>
-              <a:t>06</a:t>
+              <a:t>09</a:t>
             </a:r>
             <a:endParaRPr lang="en-US" sz="1600" dirty="0"/>
           </a:p>
@@ -2846,6 +4013,13 @@
 <file path=ppt/slides/slide3.xml><?xml version="1.0" encoding="utf-8"?>
 <p:sld xmlns:a="http://schemas.openxmlformats.org/drawingml/2006/main" xmlns:r="http://schemas.openxmlformats.org/officeDocument/2006/relationships" xmlns:p="http://schemas.openxmlformats.org/presentationml/2006/main">
   <p:cSld name="Slide 3">
+    <p:bg>
+      <p:bgPr>
+        <a:solidFill>
+          <a:srgbClr val="FAF8F1"/>
+        </a:solidFill>
+      </p:bgPr>
+    </p:bg>
     <p:spTree>
       <p:nvGrpSpPr>
         <p:cNvPr id="1" name=""/>
@@ -2860,9 +4034,135 @@
           <a:chExt cx="0" cy="0"/>
         </a:xfrm>
       </p:grpSpPr>
+      <p:sp>
+        <p:nvSpPr>
+          <p:cNvPr id="2" name="Text 0"/>
+          <p:cNvSpPr/>
+          <p:nvPr/>
+        </p:nvSpPr>
+        <p:spPr>
+          <a:xfrm>
+            <a:off x="822960" y="457200"/>
+            <a:ext cx="6400800" cy="274320"/>
+          </a:xfrm>
+          <a:prstGeom prst="rect">
+            <a:avLst/>
+          </a:prstGeom>
+          <a:noFill/>
+          <a:ln/>
+        </p:spPr>
+        <p:txBody>
+          <a:bodyPr wrap="square" lIns="0" tIns="0" rIns="0" bIns="0" rtlCol="0" anchor="ctr"/>
+          <a:lstStyle/>
+          <a:p>
+            <a:pPr algn="l" indent="0" marL="0">
+              <a:buNone/>
+            </a:pPr>
+            <a:r>
+              <a:rPr lang="en-US" sz="1100" b="1" spc="250" kern="0" dirty="0">
+                <a:solidFill>
+                  <a:srgbClr val="4A6B5D"/>
+                </a:solidFill>
+                <a:latin typeface="Arial" pitchFamily="34" charset="0"/>
+                <a:ea typeface="Arial" pitchFamily="34" charset="-122"/>
+                <a:cs typeface="Arial" pitchFamily="34" charset="-120"/>
+              </a:rPr>
+              <a:t>THE REHEARSAL PAPER</a:t>
+            </a:r>
+            <a:endParaRPr lang="en-US" sz="1100" dirty="0"/>
+          </a:p>
+        </p:txBody>
+      </p:sp>
+      <p:sp>
+        <p:nvSpPr>
+          <p:cNvPr id="3" name="Text 1"/>
+          <p:cNvSpPr/>
+          <p:nvPr/>
+        </p:nvSpPr>
+        <p:spPr>
+          <a:xfrm>
+            <a:off x="6793992" y="457200"/>
+            <a:ext cx="4572000" cy="274320"/>
+          </a:xfrm>
+          <a:prstGeom prst="rect">
+            <a:avLst/>
+          </a:prstGeom>
+          <a:noFill/>
+          <a:ln/>
+        </p:spPr>
+        <p:txBody>
+          <a:bodyPr wrap="square" lIns="0" tIns="0" rIns="0" bIns="0" rtlCol="0" anchor="ctr"/>
+          <a:lstStyle/>
+          <a:p>
+            <a:pPr algn="r" indent="0" marL="0">
+              <a:buNone/>
+            </a:pPr>
+            <a:r>
+              <a:rPr lang="en-US" sz="1100" b="1" spc="250" kern="0" dirty="0">
+                <a:solidFill>
+                  <a:srgbClr val="7A7F72"/>
+                </a:solidFill>
+                <a:latin typeface="Arial" pitchFamily="34" charset="0"/>
+                <a:ea typeface="Arial" pitchFamily="34" charset="-122"/>
+                <a:cs typeface="Arial" pitchFamily="34" charset="-120"/>
+              </a:rPr>
+              <a:t>SEEN ONCE AT L08; KNOWN COLD BY FRIDAY</a:t>
+            </a:r>
+            <a:endParaRPr lang="en-US" sz="1100" dirty="0"/>
+          </a:p>
+        </p:txBody>
+      </p:sp>
+      <p:sp>
+        <p:nvSpPr>
+          <p:cNvPr id="4" name="Shape 2"/>
+          <p:cNvSpPr/>
+          <p:nvPr/>
+        </p:nvSpPr>
+        <p:spPr>
+          <a:xfrm>
+            <a:off x="822960" y="786384"/>
+            <a:ext cx="10543032" cy="0"/>
+          </a:xfrm>
+          <a:prstGeom prst="line">
+            <a:avLst/>
+          </a:prstGeom>
+          <a:noFill/>
+          <a:ln w="9525">
+            <a:solidFill>
+              <a:srgbClr val="D9D4C4"/>
+            </a:solidFill>
+            <a:prstDash val="solid"/>
+          </a:ln>
+        </p:spPr>
+      </p:sp>
+      <p:sp>
+        <p:nvSpPr>
+          <p:cNvPr id="5" name="Shape 3"/>
+          <p:cNvSpPr/>
+          <p:nvPr/>
+        </p:nvSpPr>
+        <p:spPr>
+          <a:xfrm>
+            <a:off x="822960" y="1234440"/>
+            <a:ext cx="5989320" cy="4023360"/>
+          </a:xfrm>
+          <a:prstGeom prst="rect">
+            <a:avLst/>
+          </a:prstGeom>
+          <a:solidFill>
+            <a:srgbClr val="FAF8F1"/>
+          </a:solidFill>
+          <a:ln w="9525">
+            <a:solidFill>
+              <a:srgbClr val="D9D4C4"/>
+            </a:solidFill>
+            <a:prstDash val="solid"/>
+          </a:ln>
+        </p:spPr>
+      </p:sp>
       <p:pic>
         <p:nvPicPr>
-          <p:cNvPr id="2" name="Image 0" descr="/Users/dogan/Documents/Vaults/Courses/wiki/classes/media-studies/decks/_build/img/crops/caravaggio-musicians_a1777.jpg">    </p:cNvPr>
+          <p:cNvPr id="6" name="Image 0" descr="/Users/dogan/Documents/Vaults/Courses/wiki/classes/media-studies/decks/_build/img/yourhonor-adam.jpg">    </p:cNvPr>
           <p:cNvPicPr>
             <a:picLocks noChangeAspect="1"/>
           </p:cNvPicPr>
@@ -2876,8 +4176,8 @@
         </p:blipFill>
         <p:spPr>
           <a:xfrm>
-            <a:off x="0" y="0"/>
-            <a:ext cx="12188952" cy="6858000"/>
+            <a:off x="993503" y="1362456"/>
+            <a:ext cx="5648234" cy="3767328"/>
           </a:xfrm>
           <a:prstGeom prst="rect">
             <a:avLst/>
@@ -2886,14 +4186,56 @@
       </p:pic>
       <p:sp>
         <p:nvSpPr>
-          <p:cNvPr id="3" name="Shape 0"/>
-          <p:cNvSpPr/>
-          <p:nvPr/>
-        </p:nvSpPr>
-        <p:spPr>
-          <a:xfrm>
-            <a:off x="502920" y="502920"/>
-            <a:ext cx="5120640" cy="502920"/>
+          <p:cNvPr id="7" name="Text 4"/>
+          <p:cNvSpPr/>
+          <p:nvPr/>
+        </p:nvSpPr>
+        <p:spPr>
+          <a:xfrm>
+            <a:off x="822960" y="5303520"/>
+            <a:ext cx="5989320" cy="548640"/>
+          </a:xfrm>
+          <a:prstGeom prst="rect">
+            <a:avLst/>
+          </a:prstGeom>
+          <a:noFill/>
+          <a:ln/>
+        </p:spPr>
+        <p:txBody>
+          <a:bodyPr wrap="square" lIns="0" tIns="0" rIns="0" bIns="0" rtlCol="0" anchor="t"/>
+          <a:lstStyle/>
+          <a:p>
+            <a:pPr algn="ctr" indent="0" marL="0">
+              <a:lnSpc>
+                <a:spcPts val="1300"/>
+              </a:lnSpc>
+              <a:buNone/>
+            </a:pPr>
+            <a:r>
+              <a:rPr lang="en-US" sz="1000" dirty="0">
+                <a:solidFill>
+                  <a:srgbClr val="7A7F72"/>
+                </a:solidFill>
+                <a:latin typeface="Arial" pitchFamily="34" charset="0"/>
+                <a:ea typeface="Arial" pitchFamily="34" charset="-122"/>
+                <a:cs typeface="Arial" pitchFamily="34" charset="-120"/>
+              </a:rPr>
+              <a:t>Adam Desiato, the extract's main character: the t-shirt, the injury, the middle-class Volvo, exactly as the mark scheme reads them</a:t>
+            </a:r>
+            <a:endParaRPr lang="en-US" sz="1000" dirty="0"/>
+          </a:p>
+        </p:txBody>
+      </p:sp>
+      <p:sp>
+        <p:nvSpPr>
+          <p:cNvPr id="8" name="Shape 5"/>
+          <p:cNvSpPr/>
+          <p:nvPr/>
+        </p:nvSpPr>
+        <p:spPr>
+          <a:xfrm>
+            <a:off x="7223760" y="1051560"/>
+            <a:ext cx="4114800" cy="4892040"/>
           </a:xfrm>
           <a:prstGeom prst="rect">
             <a:avLst/>
@@ -2901,19 +4243,48 @@
           <a:solidFill>
             <a:srgbClr val="FAF8F1"/>
           </a:solidFill>
-          <a:ln/>
-        </p:spPr>
-      </p:sp>
-      <p:sp>
-        <p:nvSpPr>
-          <p:cNvPr id="4" name="Text 1"/>
-          <p:cNvSpPr/>
-          <p:nvPr/>
-        </p:nvSpPr>
-        <p:spPr>
-          <a:xfrm>
-            <a:off x="704088" y="521208"/>
-            <a:ext cx="4846320" cy="274320"/>
+          <a:ln w="9525">
+            <a:solidFill>
+              <a:srgbClr val="D9D4C4"/>
+            </a:solidFill>
+            <a:prstDash val="solid"/>
+          </a:ln>
+        </p:spPr>
+      </p:sp>
+      <p:pic>
+        <p:nvPicPr>
+          <p:cNvPr id="9" name="Image 1" descr="/Users/dogan/Documents/Vaults/Courses/wiki/classes/media-studies/decks/_build/img/qp21-p2.jpg">    </p:cNvPr>
+          <p:cNvPicPr>
+            <a:picLocks noChangeAspect="1"/>
+          </p:cNvPicPr>
+          <p:nvPr/>
+        </p:nvPicPr>
+        <p:blipFill>
+          <a:blip r:embed="rId2"/>
+          <a:stretch>
+            <a:fillRect/>
+          </a:stretch>
+        </p:blipFill>
+        <p:spPr>
+          <a:xfrm>
+            <a:off x="7642007" y="1179576"/>
+            <a:ext cx="3278306" cy="4636008"/>
+          </a:xfrm>
+          <a:prstGeom prst="rect">
+            <a:avLst/>
+          </a:prstGeom>
+        </p:spPr>
+      </p:pic>
+      <p:sp>
+        <p:nvSpPr>
+          <p:cNvPr id="10" name="Text 6"/>
+          <p:cNvSpPr/>
+          <p:nvPr/>
+        </p:nvSpPr>
+        <p:spPr>
+          <a:xfrm>
+            <a:off x="7223760" y="5943600"/>
+            <a:ext cx="4114800" cy="274320"/>
           </a:xfrm>
           <a:prstGeom prst="rect">
             <a:avLst/>
@@ -2925,62 +4296,81 @@
           <a:bodyPr wrap="square" lIns="0" tIns="0" rIns="0" bIns="0" rtlCol="0" anchor="ctr"/>
           <a:lstStyle/>
           <a:p>
-            <a:pPr algn="l" indent="0" marL="0">
-              <a:buNone/>
-            </a:pPr>
-            <a:r>
-              <a:rPr lang="en-US" sz="1100" b="1" spc="250" kern="0" dirty="0">
-                <a:solidFill>
-                  <a:srgbClr val="4A6B5D"/>
+            <a:pPr algn="ctr" indent="0" marL="0">
+              <a:buNone/>
+            </a:pPr>
+            <a:r>
+              <a:rPr lang="en-US" sz="1000" dirty="0">
+                <a:solidFill>
+                  <a:srgbClr val="7A7F72"/>
                 </a:solidFill>
                 <a:latin typeface="Arial" pitchFamily="34" charset="0"/>
                 <a:ea typeface="Arial" pitchFamily="34" charset="-122"/>
                 <a:cs typeface="Arial" pitchFamily="34" charset="-120"/>
               </a:rPr>
-              <a:t>REHEARSAL, MID-NOTE</a:t>
-            </a:r>
-            <a:endParaRPr lang="en-US" sz="1100" dirty="0"/>
-          </a:p>
-        </p:txBody>
-      </p:sp>
-      <p:sp>
-        <p:nvSpPr>
-          <p:cNvPr id="5" name="Shape 2"/>
-          <p:cNvSpPr/>
-          <p:nvPr/>
-        </p:nvSpPr>
-        <p:spPr>
-          <a:xfrm>
-            <a:off x="457200" y="5230368"/>
-            <a:ext cx="8778240" cy="1243584"/>
-          </a:xfrm>
-          <a:prstGeom prst="rect">
-            <a:avLst/>
-          </a:prstGeom>
-          <a:solidFill>
-            <a:srgbClr val="FAF8F1"/>
-          </a:solidFill>
-          <a:ln/>
-        </p:spPr>
-      </p:sp>
-      <p:sp>
-        <p:nvSpPr>
-          <p:cNvPr id="6" name="Shape 3"/>
-          <p:cNvSpPr/>
-          <p:nvPr/>
-        </p:nvSpPr>
-        <p:spPr>
-          <a:xfrm>
-            <a:off x="676656" y="5468112"/>
-            <a:ext cx="731520" cy="0"/>
+              <a:t>June 2024 Paper 2/21, the whole paper on one page</a:t>
+            </a:r>
+            <a:endParaRPr lang="en-US" sz="1000" dirty="0"/>
+          </a:p>
+        </p:txBody>
+      </p:sp>
+      <p:sp>
+        <p:nvSpPr>
+          <p:cNvPr id="11" name="Text 7"/>
+          <p:cNvSpPr/>
+          <p:nvPr/>
+        </p:nvSpPr>
+        <p:spPr>
+          <a:xfrm>
+            <a:off x="822960" y="5870448"/>
+            <a:ext cx="5989320" cy="274320"/>
+          </a:xfrm>
+          <a:prstGeom prst="rect">
+            <a:avLst/>
+          </a:prstGeom>
+          <a:noFill/>
+          <a:ln/>
+        </p:spPr>
+        <p:txBody>
+          <a:bodyPr wrap="square" lIns="0" tIns="0" rIns="0" bIns="0" rtlCol="0" anchor="ctr"/>
+          <a:lstStyle/>
+          <a:p>
+            <a:pPr algn="ctr" indent="0" marL="0">
+              <a:buNone/>
+            </a:pPr>
+            <a:r>
+              <a:rPr lang="en-US" sz="900" dirty="0">
+                <a:solidFill>
+                  <a:srgbClr val="7A7F72"/>
+                </a:solidFill>
+                <a:latin typeface="Arial" pitchFamily="34" charset="0"/>
+                <a:ea typeface="Arial" pitchFamily="34" charset="-122"/>
+                <a:cs typeface="Arial" pitchFamily="34" charset="-120"/>
+              </a:rPr>
+              <a:t>Showtime, Your Honor, S1 E1 'Part One' (2020), publicity still</a:t>
+            </a:r>
+            <a:endParaRPr lang="en-US" sz="900" dirty="0"/>
+          </a:p>
+        </p:txBody>
+      </p:sp>
+      <p:sp>
+        <p:nvSpPr>
+          <p:cNvPr id="12" name="Shape 8"/>
+          <p:cNvSpPr/>
+          <p:nvPr/>
+        </p:nvSpPr>
+        <p:spPr>
+          <a:xfrm>
+            <a:off x="822960" y="6382512"/>
+            <a:ext cx="10543032" cy="0"/>
           </a:xfrm>
           <a:prstGeom prst="line">
             <a:avLst/>
           </a:prstGeom>
           <a:noFill/>
-          <a:ln w="28575">
+          <a:ln w="9525">
             <a:solidFill>
-              <a:srgbClr val="8C3A38"/>
+              <a:srgbClr val="D9D4C4"/>
             </a:solidFill>
             <a:prstDash val="solid"/>
           </a:ln>
@@ -2988,82 +4378,79 @@
       </p:sp>
       <p:sp>
         <p:nvSpPr>
-          <p:cNvPr id="7" name="Text 4"/>
-          <p:cNvSpPr/>
-          <p:nvPr/>
-        </p:nvSpPr>
-        <p:spPr>
-          <a:xfrm>
-            <a:off x="676656" y="5541264"/>
-            <a:ext cx="8339328" cy="585216"/>
-          </a:xfrm>
-          <a:prstGeom prst="rect">
-            <a:avLst/>
-          </a:prstGeom>
-          <a:noFill/>
-          <a:ln/>
-        </p:spPr>
-        <p:txBody>
-          <a:bodyPr wrap="square" lIns="0" tIns="0" rIns="0" bIns="0" rtlCol="0" anchor="t"/>
+          <p:cNvPr id="13" name="Text 9"/>
+          <p:cNvSpPr/>
+          <p:nvPr/>
+        </p:nvSpPr>
+        <p:spPr>
+          <a:xfrm>
+            <a:off x="822960" y="6419088"/>
+            <a:ext cx="7315200" cy="274320"/>
+          </a:xfrm>
+          <a:prstGeom prst="rect">
+            <a:avLst/>
+          </a:prstGeom>
+          <a:noFill/>
+          <a:ln/>
+        </p:spPr>
+        <p:txBody>
+          <a:bodyPr wrap="square" lIns="0" tIns="0" rIns="0" bIns="0" rtlCol="0" anchor="ctr"/>
           <a:lstStyle/>
           <a:p>
             <a:pPr indent="0" marL="0">
-              <a:lnSpc>
-                <a:spcPts val="2200"/>
-              </a:lnSpc>
-              <a:buNone/>
-            </a:pPr>
-            <a:r>
-              <a:rPr lang="en-US" sz="1800" dirty="0">
-                <a:solidFill>
-                  <a:srgbClr val="24313F"/>
+              <a:buNone/>
+            </a:pPr>
+            <a:r>
+              <a:rPr lang="en-US" sz="900" spc="150" kern="0" dirty="0">
+                <a:solidFill>
+                  <a:srgbClr val="7A7F72"/>
+                </a:solidFill>
+                <a:latin typeface="Arial" pitchFamily="34" charset="0"/>
+                <a:ea typeface="Arial" pitchFamily="34" charset="-122"/>
+                <a:cs typeface="Arial" pitchFamily="34" charset="-120"/>
+              </a:rPr>
+              <a:t>MEDIA STUDIES 9607 · SEMESTER I</a:t>
+            </a:r>
+            <a:endParaRPr lang="en-US" sz="900" dirty="0"/>
+          </a:p>
+        </p:txBody>
+      </p:sp>
+      <p:sp>
+        <p:nvSpPr>
+          <p:cNvPr id="14" name="Text 10"/>
+          <p:cNvSpPr/>
+          <p:nvPr/>
+        </p:nvSpPr>
+        <p:spPr>
+          <a:xfrm>
+            <a:off x="10268712" y="6355080"/>
+            <a:ext cx="1097280" cy="365760"/>
+          </a:xfrm>
+          <a:prstGeom prst="rect">
+            <a:avLst/>
+          </a:prstGeom>
+          <a:noFill/>
+          <a:ln/>
+        </p:spPr>
+        <p:txBody>
+          <a:bodyPr wrap="square" lIns="0" tIns="0" rIns="0" bIns="0" rtlCol="0" anchor="ctr"/>
+          <a:lstStyle/>
+          <a:p>
+            <a:pPr algn="r" indent="0" marL="0">
+              <a:buNone/>
+            </a:pPr>
+            <a:r>
+              <a:rPr lang="en-US" sz="1600" dirty="0">
+                <a:solidFill>
+                  <a:srgbClr val="A3C1AD"/>
                 </a:solidFill>
                 <a:latin typeface="Georgia" pitchFamily="34" charset="0"/>
                 <a:ea typeface="Georgia" pitchFamily="34" charset="-122"/>
                 <a:cs typeface="Georgia" pitchFamily="34" charset="-120"/>
               </a:rPr>
-              <a:t>You rehearse until the score disappears and only the playing is left. The exam is the same.</a:t>
-            </a:r>
-            <a:endParaRPr lang="en-US" sz="1800" dirty="0"/>
-          </a:p>
-        </p:txBody>
-      </p:sp>
-      <p:sp>
-        <p:nvSpPr>
-          <p:cNvPr id="8" name="Text 5"/>
-          <p:cNvSpPr/>
-          <p:nvPr/>
-        </p:nvSpPr>
-        <p:spPr>
-          <a:xfrm>
-            <a:off x="676656" y="6181344"/>
-            <a:ext cx="8339328" cy="256032"/>
-          </a:xfrm>
-          <a:prstGeom prst="rect">
-            <a:avLst/>
-          </a:prstGeom>
-          <a:noFill/>
-          <a:ln/>
-        </p:spPr>
-        <p:txBody>
-          <a:bodyPr wrap="square" lIns="0" tIns="0" rIns="0" bIns="0" rtlCol="0" anchor="ctr"/>
-          <a:lstStyle/>
-          <a:p>
-            <a:pPr indent="0" marL="0">
-              <a:buNone/>
-            </a:pPr>
-            <a:r>
-              <a:rPr lang="en-US" sz="950" spc="50" kern="0" dirty="0">
-                <a:solidFill>
-                  <a:srgbClr val="7A7F72"/>
-                </a:solidFill>
-                <a:latin typeface="Arial" pitchFamily="34" charset="0"/>
-                <a:ea typeface="Arial" pitchFamily="34" charset="-122"/>
-                <a:cs typeface="Arial" pitchFamily="34" charset="-120"/>
-              </a:rPr>
-              <a:t>Caravaggio, The Musicians, 1595</a:t>
-            </a:r>
-            <a:endParaRPr lang="en-US" sz="950" dirty="0"/>
+              <a:t>01</a:t>
+            </a:r>
+            <a:endParaRPr lang="en-US" sz="1600" dirty="0"/>
           </a:p>
         </p:txBody>
       </p:sp>
@@ -3383,8 +4770,8 @@
         </p:nvSpPr>
         <p:spPr>
           <a:xfrm>
-            <a:off x="822960" y="932688"/>
-            <a:ext cx="10543032" cy="640080"/>
+            <a:off x="822960" y="914400"/>
+            <a:ext cx="10543032" cy="548640"/>
           </a:xfrm>
           <a:prstGeom prst="rect">
             <a:avLst/>
@@ -3400,7 +4787,7 @@
               <a:buNone/>
             </a:pPr>
             <a:r>
-              <a:rPr lang="en-US" sz="3200" dirty="0">
+              <a:rPr lang="en-US" sz="3000" dirty="0">
                 <a:solidFill>
                   <a:srgbClr val="24313F"/>
                 </a:solidFill>
@@ -3410,7 +4797,7 @@
               </a:rPr>
               <a:t>Two hours, three segments</a:t>
             </a:r>
-            <a:endParaRPr lang="en-US" sz="3200" dirty="0"/>
+            <a:endParaRPr lang="en-US" sz="3000" dirty="0"/>
           </a:p>
         </p:txBody>
       </p:sp>
@@ -3422,8 +4809,8 @@
         </p:nvSpPr>
         <p:spPr>
           <a:xfrm>
-            <a:off x="822960" y="2377440"/>
-            <a:ext cx="2635758" cy="1188720"/>
+            <a:off x="822960" y="1645920"/>
+            <a:ext cx="2635758" cy="1051560"/>
           </a:xfrm>
           <a:prstGeom prst="rect">
             <a:avLst/>
@@ -3442,7 +4829,7 @@
         </p:nvSpPr>
         <p:spPr>
           <a:xfrm>
-            <a:off x="822960" y="2560320"/>
+            <a:off x="822960" y="1773936"/>
             <a:ext cx="2635758" cy="457200"/>
           </a:xfrm>
           <a:prstGeom prst="rect">
@@ -3459,7 +4846,7 @@
               <a:buNone/>
             </a:pPr>
             <a:r>
-              <a:rPr lang="en-US" sz="2400" dirty="0">
+              <a:rPr lang="en-US" sz="2200" dirty="0">
                 <a:solidFill>
                   <a:srgbClr val="24313F"/>
                 </a:solidFill>
@@ -3469,7 +4856,7 @@
               </a:rPr>
               <a:t>30 min</a:t>
             </a:r>
-            <a:endParaRPr lang="en-US" sz="2400" dirty="0"/>
+            <a:endParaRPr lang="en-US" sz="2200" dirty="0"/>
           </a:p>
         </p:txBody>
       </p:sp>
@@ -3481,7 +4868,7 @@
         </p:nvSpPr>
         <p:spPr>
           <a:xfrm>
-            <a:off x="822960" y="3035808"/>
+            <a:off x="822960" y="2212848"/>
             <a:ext cx="2635758" cy="365760"/>
           </a:xfrm>
           <a:prstGeom prst="rect">
@@ -3498,7 +4885,7 @@
               <a:buNone/>
             </a:pPr>
             <a:r>
-              <a:rPr lang="en-US" sz="1200" spc="50" kern="0" dirty="0">
+              <a:rPr lang="en-US" sz="1150" spc="50" kern="0" dirty="0">
                 <a:solidFill>
                   <a:srgbClr val="24313F"/>
                 </a:solidFill>
@@ -3508,7 +4895,7 @@
               </a:rPr>
               <a:t>Viewing and notes</a:t>
             </a:r>
-            <a:endParaRPr lang="en-US" sz="1200" dirty="0"/>
+            <a:endParaRPr lang="en-US" sz="1150" dirty="0"/>
           </a:p>
         </p:txBody>
       </p:sp>
@@ -3520,8 +4907,8 @@
         </p:nvSpPr>
         <p:spPr>
           <a:xfrm>
-            <a:off x="3458718" y="2377440"/>
-            <a:ext cx="3953637" cy="1188720"/>
+            <a:off x="3458718" y="1645920"/>
+            <a:ext cx="3953637" cy="1051560"/>
           </a:xfrm>
           <a:prstGeom prst="rect">
             <a:avLst/>
@@ -3540,7 +4927,7 @@
         </p:nvSpPr>
         <p:spPr>
           <a:xfrm>
-            <a:off x="3458718" y="2560320"/>
+            <a:off x="3458718" y="1773936"/>
             <a:ext cx="3953637" cy="457200"/>
           </a:xfrm>
           <a:prstGeom prst="rect">
@@ -3557,7 +4944,7 @@
               <a:buNone/>
             </a:pPr>
             <a:r>
-              <a:rPr lang="en-US" sz="2400" dirty="0">
+              <a:rPr lang="en-US" sz="2200" dirty="0">
                 <a:solidFill>
                   <a:srgbClr val="FAF8F1"/>
                 </a:solidFill>
@@ -3567,7 +4954,7 @@
               </a:rPr>
               <a:t>45 min</a:t>
             </a:r>
-            <a:endParaRPr lang="en-US" sz="2400" dirty="0"/>
+            <a:endParaRPr lang="en-US" sz="2200" dirty="0"/>
           </a:p>
         </p:txBody>
       </p:sp>
@@ -3579,7 +4966,7 @@
         </p:nvSpPr>
         <p:spPr>
           <a:xfrm>
-            <a:off x="3458718" y="3035808"/>
+            <a:off x="3458718" y="2212848"/>
             <a:ext cx="3953637" cy="365760"/>
           </a:xfrm>
           <a:prstGeom prst="rect">
@@ -3596,7 +4983,7 @@
               <a:buNone/>
             </a:pPr>
             <a:r>
-              <a:rPr lang="en-US" sz="1200" spc="50" kern="0" dirty="0">
+              <a:rPr lang="en-US" sz="1150" spc="50" kern="0" dirty="0">
                 <a:solidFill>
                   <a:srgbClr val="FAF8F1"/>
                 </a:solidFill>
@@ -3606,7 +4993,7 @@
               </a:rPr>
               <a:t>Section A</a:t>
             </a:r>
-            <a:endParaRPr lang="en-US" sz="1200" dirty="0"/>
+            <a:endParaRPr lang="en-US" sz="1150" dirty="0"/>
           </a:p>
         </p:txBody>
       </p:sp>
@@ -3618,8 +5005,8 @@
         </p:nvSpPr>
         <p:spPr>
           <a:xfrm>
-            <a:off x="7412355" y="2377440"/>
-            <a:ext cx="3953637" cy="1188720"/>
+            <a:off x="7412355" y="1645920"/>
+            <a:ext cx="3953637" cy="1051560"/>
           </a:xfrm>
           <a:prstGeom prst="rect">
             <a:avLst/>
@@ -3638,7 +5025,7 @@
         </p:nvSpPr>
         <p:spPr>
           <a:xfrm>
-            <a:off x="7412355" y="2560320"/>
+            <a:off x="7412355" y="1773936"/>
             <a:ext cx="3953637" cy="457200"/>
           </a:xfrm>
           <a:prstGeom prst="rect">
@@ -3655,7 +5042,7 @@
               <a:buNone/>
             </a:pPr>
             <a:r>
-              <a:rPr lang="en-US" sz="2400" dirty="0">
+              <a:rPr lang="en-US" sz="2200" dirty="0">
                 <a:solidFill>
                   <a:srgbClr val="FAF8F1"/>
                 </a:solidFill>
@@ -3665,7 +5052,7 @@
               </a:rPr>
               <a:t>45 min</a:t>
             </a:r>
-            <a:endParaRPr lang="en-US" sz="2400" dirty="0"/>
+            <a:endParaRPr lang="en-US" sz="2200" dirty="0"/>
           </a:p>
         </p:txBody>
       </p:sp>
@@ -3677,7 +5064,7 @@
         </p:nvSpPr>
         <p:spPr>
           <a:xfrm>
-            <a:off x="7412355" y="3035808"/>
+            <a:off x="7412355" y="2212848"/>
             <a:ext cx="3953637" cy="365760"/>
           </a:xfrm>
           <a:prstGeom prst="rect">
@@ -3694,7 +5081,7 @@
               <a:buNone/>
             </a:pPr>
             <a:r>
-              <a:rPr lang="en-US" sz="1200" spc="50" kern="0" dirty="0">
+              <a:rPr lang="en-US" sz="1150" spc="50" kern="0" dirty="0">
                 <a:solidFill>
                   <a:srgbClr val="FAF8F1"/>
                 </a:solidFill>
@@ -3704,129 +5091,27 @@
               </a:rPr>
               <a:t>Section B</a:t>
             </a:r>
-            <a:endParaRPr lang="en-US" sz="1200" dirty="0"/>
-          </a:p>
-        </p:txBody>
-      </p:sp>
-      <p:sp>
-        <p:nvSpPr>
-          <p:cNvPr id="15" name="Text 13"/>
-          <p:cNvSpPr/>
-          <p:nvPr/>
-        </p:nvSpPr>
-        <p:spPr>
-          <a:xfrm>
-            <a:off x="822960" y="4023360"/>
-            <a:ext cx="10543032" cy="548640"/>
-          </a:xfrm>
-          <a:prstGeom prst="rect">
-            <a:avLst/>
-          </a:prstGeom>
-          <a:noFill/>
-          <a:ln/>
-        </p:spPr>
-        <p:txBody>
-          <a:bodyPr wrap="square" lIns="0" tIns="0" rIns="0" bIns="0" rtlCol="0" anchor="t"/>
-          <a:lstStyle/>
-          <a:p>
-            <a:pPr indent="0" marL="0">
-              <a:lnSpc>
-                <a:spcPts val="2200"/>
-              </a:lnSpc>
-              <a:buNone/>
-            </a:pPr>
-            <a:r>
-              <a:rPr lang="en-US" sz="1600" dirty="0">
-                <a:solidFill>
-                  <a:srgbClr val="24313F"/>
-                </a:solidFill>
-                <a:latin typeface="Georgia" pitchFamily="34" charset="0"/>
-                <a:ea typeface="Georgia" pitchFamily="34" charset="-122"/>
-                <a:cs typeface="Georgia" pitchFamily="34" charset="-120"/>
-              </a:rPr>
-              <a:t>Four screenings inside the viewing window, no notes on the first. The frozen Q1 stem is verbatim in every sitting: know it cold by Friday.</a:t>
-            </a:r>
-            <a:endParaRPr lang="en-US" sz="1600" dirty="0"/>
-          </a:p>
-        </p:txBody>
-      </p:sp>
-      <p:sp>
-        <p:nvSpPr>
-          <p:cNvPr id="16" name="Shape 14"/>
-          <p:cNvSpPr/>
-          <p:nvPr/>
-        </p:nvSpPr>
-        <p:spPr>
-          <a:xfrm>
-            <a:off x="822960" y="4937760"/>
-            <a:ext cx="914400" cy="0"/>
-          </a:xfrm>
-          <a:prstGeom prst="line">
-            <a:avLst/>
-          </a:prstGeom>
-          <a:noFill/>
-          <a:ln w="31750">
-            <a:solidFill>
-              <a:srgbClr val="8C3A38"/>
-            </a:solidFill>
-            <a:prstDash val="solid"/>
-          </a:ln>
-        </p:spPr>
-      </p:sp>
-      <p:sp>
-        <p:nvSpPr>
-          <p:cNvPr id="17" name="Text 15"/>
-          <p:cNvSpPr/>
-          <p:nvPr/>
-        </p:nvSpPr>
-        <p:spPr>
-          <a:xfrm>
-            <a:off x="822960" y="5120640"/>
-            <a:ext cx="10543032" cy="457200"/>
-          </a:xfrm>
-          <a:prstGeom prst="rect">
-            <a:avLst/>
-          </a:prstGeom>
-          <a:noFill/>
-          <a:ln/>
-        </p:spPr>
-        <p:txBody>
-          <a:bodyPr wrap="square" lIns="0" tIns="0" rIns="0" bIns="0" rtlCol="0" anchor="ctr"/>
-          <a:lstStyle/>
-          <a:p>
-            <a:pPr indent="0" marL="0">
-              <a:buNone/>
-            </a:pPr>
-            <a:r>
-              <a:rPr lang="en-US" sz="1250" i="1" dirty="0">
-                <a:solidFill>
-                  <a:srgbClr val="7A7F72"/>
-                </a:solidFill>
-                <a:latin typeface="Arial" pitchFamily="34" charset="0"/>
-                <a:ea typeface="Arial" pitchFamily="34" charset="-122"/>
-                <a:cs typeface="Arial" pitchFamily="34" charset="-120"/>
-              </a:rPr>
-              <a:t>Write your own minute budget inside each section: paragraphs, plan time, check time. A promise to Wednesday.</a:t>
-            </a:r>
-            <a:endParaRPr lang="en-US" sz="1250" dirty="0"/>
-          </a:p>
-        </p:txBody>
-      </p:sp>
-      <p:sp>
-        <p:nvSpPr>
-          <p:cNvPr id="18" name="Shape 16"/>
-          <p:cNvSpPr/>
-          <p:nvPr/>
-        </p:nvSpPr>
-        <p:spPr>
-          <a:xfrm>
-            <a:off x="822960" y="6382512"/>
-            <a:ext cx="10543032" cy="0"/>
-          </a:xfrm>
-          <a:prstGeom prst="line">
-            <a:avLst/>
-          </a:prstGeom>
-          <a:noFill/>
+            <a:endParaRPr lang="en-US" sz="1150" dirty="0"/>
+          </a:p>
+        </p:txBody>
+      </p:sp>
+      <p:sp>
+        <p:nvSpPr>
+          <p:cNvPr id="15" name="Shape 13"/>
+          <p:cNvSpPr/>
+          <p:nvPr/>
+        </p:nvSpPr>
+        <p:spPr>
+          <a:xfrm>
+            <a:off x="822960" y="2971800"/>
+            <a:ext cx="10543032" cy="2880360"/>
+          </a:xfrm>
+          <a:prstGeom prst="rect">
+            <a:avLst/>
+          </a:prstGeom>
+          <a:solidFill>
+            <a:srgbClr val="FAF8F1"/>
+          </a:solidFill>
           <a:ln w="9525">
             <a:solidFill>
               <a:srgbClr val="D9D4C4"/>
@@ -3835,16 +5120,40 @@
           </a:ln>
         </p:spPr>
       </p:sp>
-      <p:sp>
-        <p:nvSpPr>
-          <p:cNvPr id="19" name="Text 17"/>
-          <p:cNvSpPr/>
-          <p:nvPr/>
-        </p:nvSpPr>
-        <p:spPr>
-          <a:xfrm>
-            <a:off x="822960" y="6419088"/>
-            <a:ext cx="7315200" cy="274320"/>
+      <p:pic>
+        <p:nvPicPr>
+          <p:cNvPr id="16" name="Image 0" descr="/Users/dogan/Documents/Vaults/Courses/wiki/classes/media-studies/decks/_build/img/qp21-stem.jpg">    </p:cNvPr>
+          <p:cNvPicPr>
+            <a:picLocks noChangeAspect="1"/>
+          </p:cNvPicPr>
+          <p:nvPr/>
+        </p:nvPicPr>
+        <p:blipFill>
+          <a:blip r:embed="rId1"/>
+          <a:stretch>
+            <a:fillRect/>
+          </a:stretch>
+        </p:blipFill>
+        <p:spPr>
+          <a:xfrm>
+            <a:off x="4102285" y="3099816"/>
+            <a:ext cx="3984381" cy="2624328"/>
+          </a:xfrm>
+          <a:prstGeom prst="rect">
+            <a:avLst/>
+          </a:prstGeom>
+        </p:spPr>
+      </p:pic>
+      <p:sp>
+        <p:nvSpPr>
+          <p:cNvPr id="17" name="Text 14"/>
+          <p:cNvSpPr/>
+          <p:nvPr/>
+        </p:nvSpPr>
+        <p:spPr>
+          <a:xfrm>
+            <a:off x="822960" y="5897880"/>
+            <a:ext cx="10543032" cy="320040"/>
           </a:xfrm>
           <a:prstGeom prst="rect">
             <a:avLst/>
@@ -3856,11 +5165,11 @@
           <a:bodyPr wrap="square" lIns="0" tIns="0" rIns="0" bIns="0" rtlCol="0" anchor="ctr"/>
           <a:lstStyle/>
           <a:p>
-            <a:pPr indent="0" marL="0">
-              <a:buNone/>
-            </a:pPr>
-            <a:r>
-              <a:rPr lang="en-US" sz="900" spc="150" kern="0" dirty="0">
+            <a:pPr algn="ctr" indent="0" marL="0">
+              <a:buNone/>
+            </a:pPr>
+            <a:r>
+              <a:rPr lang="en-US" sz="1050" dirty="0">
                 <a:solidFill>
                   <a:srgbClr val="7A7F72"/>
                 </a:solidFill>
@@ -3868,6 +5177,68 @@
                 <a:ea typeface="Arial" pitchFamily="34" charset="-122"/>
                 <a:cs typeface="Arial" pitchFamily="34" charset="-120"/>
               </a:rPr>
+              <a:t>The rubric and the frozen Q1 stem, verbatim: four screenings, no notes on the first, notes crossed out. Know it cold.</a:t>
+            </a:r>
+            <a:endParaRPr lang="en-US" sz="1050" dirty="0"/>
+          </a:p>
+        </p:txBody>
+      </p:sp>
+      <p:sp>
+        <p:nvSpPr>
+          <p:cNvPr id="18" name="Shape 15"/>
+          <p:cNvSpPr/>
+          <p:nvPr/>
+        </p:nvSpPr>
+        <p:spPr>
+          <a:xfrm>
+            <a:off x="822960" y="6382512"/>
+            <a:ext cx="10543032" cy="0"/>
+          </a:xfrm>
+          <a:prstGeom prst="line">
+            <a:avLst/>
+          </a:prstGeom>
+          <a:noFill/>
+          <a:ln w="9525">
+            <a:solidFill>
+              <a:srgbClr val="D9D4C4"/>
+            </a:solidFill>
+            <a:prstDash val="solid"/>
+          </a:ln>
+        </p:spPr>
+      </p:sp>
+      <p:sp>
+        <p:nvSpPr>
+          <p:cNvPr id="19" name="Text 16"/>
+          <p:cNvSpPr/>
+          <p:nvPr/>
+        </p:nvSpPr>
+        <p:spPr>
+          <a:xfrm>
+            <a:off x="822960" y="6419088"/>
+            <a:ext cx="7315200" cy="274320"/>
+          </a:xfrm>
+          <a:prstGeom prst="rect">
+            <a:avLst/>
+          </a:prstGeom>
+          <a:noFill/>
+          <a:ln/>
+        </p:spPr>
+        <p:txBody>
+          <a:bodyPr wrap="square" lIns="0" tIns="0" rIns="0" bIns="0" rtlCol="0" anchor="ctr"/>
+          <a:lstStyle/>
+          <a:p>
+            <a:pPr indent="0" marL="0">
+              <a:buNone/>
+            </a:pPr>
+            <a:r>
+              <a:rPr lang="en-US" sz="900" spc="150" kern="0" dirty="0">
+                <a:solidFill>
+                  <a:srgbClr val="7A7F72"/>
+                </a:solidFill>
+                <a:latin typeface="Arial" pitchFamily="34" charset="0"/>
+                <a:ea typeface="Arial" pitchFamily="34" charset="-122"/>
+                <a:cs typeface="Arial" pitchFamily="34" charset="-120"/>
+              </a:rPr>
               <a:t>MEDIA STUDIES 9607 · SEMESTER I</a:t>
             </a:r>
             <a:endParaRPr lang="en-US" sz="900" dirty="0"/>
@@ -3876,7 +5247,7 @@
       </p:sp>
       <p:sp>
         <p:nvSpPr>
-          <p:cNvPr id="20" name="Text 18"/>
+          <p:cNvPr id="20" name="Text 17"/>
           <p:cNvSpPr/>
           <p:nvPr/>
         </p:nvSpPr>
@@ -3907,7 +5278,7 @@
                 <a:ea typeface="Georgia" pitchFamily="34" charset="-122"/>
                 <a:cs typeface="Georgia" pitchFamily="34" charset="-120"/>
               </a:rPr>
-              <a:t>01</a:t>
+              <a:t>02</a:t>
             </a:r>
             <a:endParaRPr lang="en-US" sz="1600" dirty="0"/>
           </a:p>
@@ -4245,7 +5616,7 @@
                 <a:ea typeface="Georgia" pitchFamily="34" charset="-122"/>
                 <a:cs typeface="Georgia" pitchFamily="34" charset="-120"/>
               </a:rPr>
-              <a:t>02</a:t>
+              <a:t>03</a:t>
             </a:r>
             <a:endParaRPr lang="en-US" sz="1600" dirty="0"/>
           </a:p>
@@ -4392,8 +5763,8 @@
         </p:nvSpPr>
         <p:spPr>
           <a:xfrm>
-            <a:off x="822960" y="1280160"/>
-            <a:ext cx="10543032" cy="914400"/>
+            <a:off x="822960" y="1051560"/>
+            <a:ext cx="5943600" cy="822960"/>
           </a:xfrm>
           <a:prstGeom prst="rect">
             <a:avLst/>
@@ -4409,7 +5780,7 @@
               <a:buNone/>
             </a:pPr>
             <a:r>
-              <a:rPr lang="en-US" sz="3600" dirty="0">
+              <a:rPr lang="en-US" sz="3000" dirty="0">
                 <a:solidFill>
                   <a:srgbClr val="24313F"/>
                 </a:solidFill>
@@ -4419,7 +5790,7 @@
               </a:rPr>
               <a:t>Peer-marked, then moderated</a:t>
             </a:r>
-            <a:endParaRPr lang="en-US" sz="3600" dirty="0"/>
+            <a:endParaRPr lang="en-US" sz="3000" dirty="0"/>
           </a:p>
         </p:txBody>
       </p:sp>
@@ -4431,7 +5802,7 @@
         </p:nvSpPr>
         <p:spPr>
           <a:xfrm>
-            <a:off x="822960" y="2514600"/>
+            <a:off x="822960" y="2011680"/>
             <a:ext cx="914400" cy="0"/>
           </a:xfrm>
           <a:prstGeom prst="line">
@@ -4454,8 +5825,8 @@
         </p:nvSpPr>
         <p:spPr>
           <a:xfrm>
-            <a:off x="822960" y="2743200"/>
-            <a:ext cx="9875520" cy="2194560"/>
+            <a:off x="822960" y="2240280"/>
+            <a:ext cx="5760720" cy="3291840"/>
           </a:xfrm>
           <a:prstGeom prst="rect">
             <a:avLst/>
@@ -4469,12 +5840,12 @@
           <a:p>
             <a:pPr indent="0" marL="0">
               <a:lnSpc>
-                <a:spcPts val="2800"/>
+                <a:spcPts val="2400"/>
               </a:lnSpc>
               <a:buNone/>
             </a:pPr>
             <a:r>
-              <a:rPr lang="en-US" sz="2000" dirty="0">
+              <a:rPr lang="en-US" sz="1700" dirty="0">
                 <a:solidFill>
                   <a:srgbClr val="24313F"/>
                 </a:solidFill>
@@ -4482,9 +5853,9 @@
                 <a:ea typeface="Georgia" pitchFamily="34" charset="-122"/>
                 <a:cs typeface="Georgia" pitchFamily="34" charset="-120"/>
               </a:rPr>
-              <a:t>Beat the Examiner, full dress. A full Section B, timed exactly, on your own case studies. Then every student marks a peer's script against the official five-criteria rubric, band words and all; the closest banding to the moderated mark takes the round. Reading the scheme as a marker is the lesson. The teacher moderates three scripts aloud, showing where the peer marks drifted.</a:t>
-            </a:r>
-            <a:endParaRPr lang="en-US" sz="2000" dirty="0"/>
+              <a:t>Beat the Examiner, full dress. A full Section B, timed exactly, on your own case studies. Then every student marks a peer's script against the official five-criteria rubric, band words and all; the closest banding to the moderated mark takes the round. The teacher moderates three scripts aloud, showing where the peer marks drifted.</a:t>
+            </a:r>
+            <a:endParaRPr lang="en-US" sz="1700" dirty="0"/>
           </a:p>
         </p:txBody>
       </p:sp>
@@ -4496,13 +5867,15 @@
         </p:nvSpPr>
         <p:spPr>
           <a:xfrm>
-            <a:off x="822960" y="6382512"/>
-            <a:ext cx="10543032" cy="0"/>
-          </a:xfrm>
-          <a:prstGeom prst="line">
-            <a:avLst/>
-          </a:prstGeom>
-          <a:noFill/>
+            <a:off x="6583680" y="1188720"/>
+            <a:ext cx="4800600" cy="4389120"/>
+          </a:xfrm>
+          <a:prstGeom prst="rect">
+            <a:avLst/>
+          </a:prstGeom>
+          <a:solidFill>
+            <a:srgbClr val="FAF8F1"/>
+          </a:solidFill>
           <a:ln w="9525">
             <a:solidFill>
               <a:srgbClr val="D9D4C4"/>
@@ -4511,16 +5884,40 @@
           </a:ln>
         </p:spPr>
       </p:sp>
-      <p:sp>
-        <p:nvSpPr>
-          <p:cNvPr id="9" name="Text 7"/>
-          <p:cNvSpPr/>
-          <p:nvPr/>
-        </p:nvSpPr>
-        <p:spPr>
-          <a:xfrm>
-            <a:off x="822960" y="6419088"/>
-            <a:ext cx="7315200" cy="274320"/>
+      <p:pic>
+        <p:nvPicPr>
+          <p:cNvPr id="9" name="Image 0" descr="/Users/dogan/Documents/Vaults/Courses/wiki/classes/media-studies/decks/_build/img/ms21-p16.jpg">    </p:cNvPr>
+          <p:cNvPicPr>
+            <a:picLocks noChangeAspect="1"/>
+          </p:cNvPicPr>
+          <p:nvPr/>
+        </p:nvPicPr>
+        <p:blipFill>
+          <a:blip r:embed="rId1"/>
+          <a:stretch>
+            <a:fillRect/>
+          </a:stretch>
+        </p:blipFill>
+        <p:spPr>
+          <a:xfrm>
+            <a:off x="6711696" y="1776458"/>
+            <a:ext cx="4544568" cy="3213645"/>
+          </a:xfrm>
+          <a:prstGeom prst="rect">
+            <a:avLst/>
+          </a:prstGeom>
+        </p:spPr>
+      </p:pic>
+      <p:sp>
+        <p:nvSpPr>
+          <p:cNvPr id="10" name="Text 7"/>
+          <p:cNvSpPr/>
+          <p:nvPr/>
+        </p:nvSpPr>
+        <p:spPr>
+          <a:xfrm>
+            <a:off x="6583680" y="5623560"/>
+            <a:ext cx="4800600" cy="320040"/>
           </a:xfrm>
           <a:prstGeom prst="rect">
             <a:avLst/>
@@ -4532,11 +5929,11 @@
           <a:bodyPr wrap="square" lIns="0" tIns="0" rIns="0" bIns="0" rtlCol="0" anchor="ctr"/>
           <a:lstStyle/>
           <a:p>
-            <a:pPr indent="0" marL="0">
-              <a:buNone/>
-            </a:pPr>
-            <a:r>
-              <a:rPr lang="en-US" sz="900" spc="150" kern="0" dirty="0">
+            <a:pPr algn="ctr" indent="0" marL="0">
+              <a:buNone/>
+            </a:pPr>
+            <a:r>
+              <a:rPr lang="en-US" sz="1000" dirty="0">
                 <a:solidFill>
                   <a:srgbClr val="7A7F72"/>
                 </a:solidFill>
@@ -4544,6 +5941,68 @@
                 <a:ea typeface="Arial" pitchFamily="34" charset="-122"/>
                 <a:cs typeface="Arial" pitchFamily="34" charset="-120"/>
               </a:rPr>
+              <a:t>Section B's own grid: audience and industry, multiple case studies</a:t>
+            </a:r>
+            <a:endParaRPr lang="en-US" sz="1000" dirty="0"/>
+          </a:p>
+        </p:txBody>
+      </p:sp>
+      <p:sp>
+        <p:nvSpPr>
+          <p:cNvPr id="11" name="Shape 8"/>
+          <p:cNvSpPr/>
+          <p:nvPr/>
+        </p:nvSpPr>
+        <p:spPr>
+          <a:xfrm>
+            <a:off x="822960" y="6382512"/>
+            <a:ext cx="10543032" cy="0"/>
+          </a:xfrm>
+          <a:prstGeom prst="line">
+            <a:avLst/>
+          </a:prstGeom>
+          <a:noFill/>
+          <a:ln w="9525">
+            <a:solidFill>
+              <a:srgbClr val="D9D4C4"/>
+            </a:solidFill>
+            <a:prstDash val="solid"/>
+          </a:ln>
+        </p:spPr>
+      </p:sp>
+      <p:sp>
+        <p:nvSpPr>
+          <p:cNvPr id="12" name="Text 9"/>
+          <p:cNvSpPr/>
+          <p:nvPr/>
+        </p:nvSpPr>
+        <p:spPr>
+          <a:xfrm>
+            <a:off x="822960" y="6419088"/>
+            <a:ext cx="7315200" cy="274320"/>
+          </a:xfrm>
+          <a:prstGeom prst="rect">
+            <a:avLst/>
+          </a:prstGeom>
+          <a:noFill/>
+          <a:ln/>
+        </p:spPr>
+        <p:txBody>
+          <a:bodyPr wrap="square" lIns="0" tIns="0" rIns="0" bIns="0" rtlCol="0" anchor="ctr"/>
+          <a:lstStyle/>
+          <a:p>
+            <a:pPr indent="0" marL="0">
+              <a:buNone/>
+            </a:pPr>
+            <a:r>
+              <a:rPr lang="en-US" sz="900" spc="150" kern="0" dirty="0">
+                <a:solidFill>
+                  <a:srgbClr val="7A7F72"/>
+                </a:solidFill>
+                <a:latin typeface="Arial" pitchFamily="34" charset="0"/>
+                <a:ea typeface="Arial" pitchFamily="34" charset="-122"/>
+                <a:cs typeface="Arial" pitchFamily="34" charset="-120"/>
+              </a:rPr>
               <a:t>MEDIA STUDIES 9607 · SEMESTER I</a:t>
             </a:r>
             <a:endParaRPr lang="en-US" sz="900" dirty="0"/>
@@ -4552,7 +6011,7 @@
       </p:sp>
       <p:sp>
         <p:nvSpPr>
-          <p:cNvPr id="10" name="Text 8"/>
+          <p:cNvPr id="13" name="Text 10"/>
           <p:cNvSpPr/>
           <p:nvPr/>
         </p:nvSpPr>
@@ -4583,7 +6042,7 @@
                 <a:ea typeface="Georgia" pitchFamily="34" charset="-122"/>
                 <a:cs typeface="Georgia" pitchFamily="34" charset="-120"/>
               </a:rPr>
-              <a:t>03</a:t>
+              <a:t>04</a:t>
             </a:r>
             <a:endParaRPr lang="en-US" sz="1600" dirty="0"/>
           </a:p>
@@ -4731,7 +6190,7 @@
         <p:spPr>
           <a:xfrm>
             <a:off x="822960" y="932688"/>
-            <a:ext cx="10543032" cy="640080"/>
+            <a:ext cx="10543032" cy="594360"/>
           </a:xfrm>
           <a:prstGeom prst="rect">
             <a:avLst/>
@@ -4747,7 +6206,7 @@
               <a:buNone/>
             </a:pPr>
             <a:r>
-              <a:rPr lang="en-US" sz="3200" dirty="0">
+              <a:rPr lang="en-US" sz="3000" dirty="0">
                 <a:solidFill>
                   <a:srgbClr val="24313F"/>
                 </a:solidFill>
@@ -4757,7 +6216,7 @@
               </a:rPr>
               <a:t>AO1 fifteen, AO2 ten</a:t>
             </a:r>
-            <a:endParaRPr lang="en-US" sz="3200" dirty="0"/>
+            <a:endParaRPr lang="en-US" sz="3000" dirty="0"/>
           </a:p>
         </p:txBody>
       </p:sp>
@@ -4769,7 +6228,7 @@
         </p:nvSpPr>
         <p:spPr>
           <a:xfrm>
-            <a:off x="822960" y="2286000"/>
+            <a:off x="822960" y="1874520"/>
             <a:ext cx="6325819" cy="1051560"/>
           </a:xfrm>
           <a:prstGeom prst="rect">
@@ -4789,7 +6248,7 @@
         </p:nvSpPr>
         <p:spPr>
           <a:xfrm>
-            <a:off x="1097280" y="2286000"/>
+            <a:off x="1097280" y="1874520"/>
             <a:ext cx="5777179" cy="1051560"/>
           </a:xfrm>
           <a:prstGeom prst="rect">
@@ -4828,7 +6287,7 @@
         </p:nvSpPr>
         <p:spPr>
           <a:xfrm>
-            <a:off x="7148779" y="2286000"/>
+            <a:off x="7148779" y="1874520"/>
             <a:ext cx="4217213" cy="1051560"/>
           </a:xfrm>
           <a:prstGeom prst="rect">
@@ -4848,7 +6307,7 @@
         </p:nvSpPr>
         <p:spPr>
           <a:xfrm>
-            <a:off x="7423099" y="2286000"/>
+            <a:off x="7423099" y="1874520"/>
             <a:ext cx="3668573" cy="1051560"/>
           </a:xfrm>
           <a:prstGeom prst="rect">
@@ -4887,7 +6346,7 @@
         </p:nvSpPr>
         <p:spPr>
           <a:xfrm>
-            <a:off x="822960" y="3474720"/>
+            <a:off x="822960" y="3035808"/>
             <a:ext cx="6325819" cy="365760"/>
           </a:xfrm>
           <a:prstGeom prst="rect">
@@ -4926,7 +6385,7 @@
         </p:nvSpPr>
         <p:spPr>
           <a:xfrm>
-            <a:off x="7148779" y="3474720"/>
+            <a:off x="7148779" y="3035808"/>
             <a:ext cx="4217213" cy="365760"/>
           </a:xfrm>
           <a:prstGeom prst="rect">
@@ -4959,58 +6418,21 @@
       </p:sp>
       <p:sp>
         <p:nvSpPr>
-          <p:cNvPr id="12" name="Text 10"/>
-          <p:cNvSpPr/>
-          <p:nvPr/>
-        </p:nvSpPr>
-        <p:spPr>
-          <a:xfrm>
-            <a:off x="822960" y="4480560"/>
-            <a:ext cx="10543032" cy="457200"/>
-          </a:xfrm>
-          <a:prstGeom prst="rect">
-            <a:avLst/>
-          </a:prstGeom>
-          <a:noFill/>
-          <a:ln/>
-        </p:spPr>
-        <p:txBody>
-          <a:bodyPr wrap="square" lIns="0" tIns="0" rIns="0" bIns="0" rtlCol="0" anchor="ctr"/>
-          <a:lstStyle/>
-          <a:p>
-            <a:pPr indent="0" marL="0">
-              <a:buNone/>
-            </a:pPr>
-            <a:r>
-              <a:rPr lang="en-US" sz="1600" i="1" dirty="0">
-                <a:solidFill>
-                  <a:srgbClr val="24313F"/>
-                </a:solidFill>
-                <a:latin typeface="Georgia" pitchFamily="34" charset="0"/>
-                <a:ea typeface="Georgia" pitchFamily="34" charset="-122"/>
-                <a:cs typeface="Georgia" pitchFamily="34" charset="-120"/>
-              </a:rPr>
-              <a:t>Five criteria, best-fit per criterion. Map it against your CS13 result: which criteria the room feeds naturally, which it starves.</a:t>
-            </a:r>
-            <a:endParaRPr lang="en-US" sz="1600" dirty="0"/>
-          </a:p>
-        </p:txBody>
-      </p:sp>
-      <p:sp>
-        <p:nvSpPr>
-          <p:cNvPr id="13" name="Shape 11"/>
-          <p:cNvSpPr/>
-          <p:nvPr/>
-        </p:nvSpPr>
-        <p:spPr>
-          <a:xfrm>
-            <a:off x="822960" y="6382512"/>
-            <a:ext cx="10543032" cy="0"/>
-          </a:xfrm>
-          <a:prstGeom prst="line">
-            <a:avLst/>
-          </a:prstGeom>
-          <a:noFill/>
+          <p:cNvPr id="12" name="Shape 10"/>
+          <p:cNvSpPr/>
+          <p:nvPr/>
+        </p:nvSpPr>
+        <p:spPr>
+          <a:xfrm>
+            <a:off x="822960" y="3703320"/>
+            <a:ext cx="10543032" cy="1554480"/>
+          </a:xfrm>
+          <a:prstGeom prst="rect">
+            <a:avLst/>
+          </a:prstGeom>
+          <a:solidFill>
+            <a:srgbClr val="FAF8F1"/>
+          </a:solidFill>
           <a:ln w="9525">
             <a:solidFill>
               <a:srgbClr val="D9D4C4"/>
@@ -5019,9 +6441,98 @@
           </a:ln>
         </p:spPr>
       </p:sp>
-      <p:sp>
-        <p:nvSpPr>
-          <p:cNvPr id="14" name="Text 12"/>
+      <p:pic>
+        <p:nvPicPr>
+          <p:cNvPr id="13" name="Image 0" descr="/Users/dogan/Documents/Vaults/Courses/wiki/classes/media-studies/decks/_build/img/ms21-p16-head.jpg">    </p:cNvPr>
+          <p:cNvPicPr>
+            <a:picLocks noChangeAspect="1"/>
+          </p:cNvPicPr>
+          <p:nvPr/>
+        </p:nvPicPr>
+        <p:blipFill>
+          <a:blip r:embed="rId1"/>
+          <a:stretch>
+            <a:fillRect/>
+          </a:stretch>
+        </p:blipFill>
+        <p:spPr>
+          <a:xfrm>
+            <a:off x="2256207" y="3831336"/>
+            <a:ext cx="7676539" cy="1298448"/>
+          </a:xfrm>
+          <a:prstGeom prst="rect">
+            <a:avLst/>
+          </a:prstGeom>
+        </p:spPr>
+      </p:pic>
+      <p:sp>
+        <p:nvSpPr>
+          <p:cNvPr id="14" name="Text 11"/>
+          <p:cNvSpPr/>
+          <p:nvPr/>
+        </p:nvSpPr>
+        <p:spPr>
+          <a:xfrm>
+            <a:off x="822960" y="5349240"/>
+            <a:ext cx="10543032" cy="548640"/>
+          </a:xfrm>
+          <a:prstGeom prst="rect">
+            <a:avLst/>
+          </a:prstGeom>
+          <a:noFill/>
+          <a:ln/>
+        </p:spPr>
+        <p:txBody>
+          <a:bodyPr wrap="square" lIns="0" tIns="0" rIns="0" bIns="0" rtlCol="0" anchor="t"/>
+          <a:lstStyle/>
+          <a:p>
+            <a:pPr indent="0" marL="0">
+              <a:lnSpc>
+                <a:spcPts val="1900"/>
+              </a:lnSpc>
+              <a:buNone/>
+            </a:pPr>
+            <a:r>
+              <a:rPr lang="en-US" sz="1400" i="1" dirty="0">
+                <a:solidFill>
+                  <a:srgbClr val="24313F"/>
+                </a:solidFill>
+                <a:latin typeface="Georgia" pitchFamily="34" charset="0"/>
+                <a:ea typeface="Georgia" pitchFamily="34" charset="-122"/>
+                <a:cs typeface="Georgia" pitchFamily="34" charset="-120"/>
+              </a:rPr>
+              <a:t>The same split in the scheme's own header: AO1 15 marks, AO2 10, five criteria of five. Map it against your CS13 result: which criteria the room feeds naturally, which it starves.</a:t>
+            </a:r>
+            <a:endParaRPr lang="en-US" sz="1400" dirty="0"/>
+          </a:p>
+        </p:txBody>
+      </p:sp>
+      <p:sp>
+        <p:nvSpPr>
+          <p:cNvPr id="15" name="Shape 12"/>
+          <p:cNvSpPr/>
+          <p:nvPr/>
+        </p:nvSpPr>
+        <p:spPr>
+          <a:xfrm>
+            <a:off x="822960" y="6382512"/>
+            <a:ext cx="10543032" cy="0"/>
+          </a:xfrm>
+          <a:prstGeom prst="line">
+            <a:avLst/>
+          </a:prstGeom>
+          <a:noFill/>
+          <a:ln w="9525">
+            <a:solidFill>
+              <a:srgbClr val="D9D4C4"/>
+            </a:solidFill>
+            <a:prstDash val="solid"/>
+          </a:ln>
+        </p:spPr>
+      </p:sp>
+      <p:sp>
+        <p:nvSpPr>
+          <p:cNvPr id="16" name="Text 13"/>
           <p:cNvSpPr/>
           <p:nvPr/>
         </p:nvSpPr>
@@ -5060,7 +6571,7 @@
       </p:sp>
       <p:sp>
         <p:nvSpPr>
-          <p:cNvPr id="15" name="Text 13"/>
+          <p:cNvPr id="17" name="Text 14"/>
           <p:cNvSpPr/>
           <p:nvPr/>
         </p:nvSpPr>
@@ -5091,7 +6602,7 @@
                 <a:ea typeface="Georgia" pitchFamily="34" charset="-122"/>
                 <a:cs typeface="Georgia" pitchFamily="34" charset="-120"/>
               </a:rPr>
-              <a:t>04</a:t>
+              <a:t>05</a:t>
             </a:r>
             <a:endParaRPr lang="en-US" sz="1600" dirty="0"/>
           </a:p>
@@ -5137,34 +6648,34 @@
         </p:nvSpPr>
         <p:spPr>
           <a:xfrm>
-            <a:off x="502920" y="548640"/>
-            <a:ext cx="1828800" cy="1828800"/>
-          </a:xfrm>
-          <a:prstGeom prst="rect">
-            <a:avLst/>
-          </a:prstGeom>
-          <a:noFill/>
-          <a:ln/>
-        </p:spPr>
-        <p:txBody>
-          <a:bodyPr wrap="square" lIns="0" tIns="0" rIns="0" bIns="0" rtlCol="0" anchor="t"/>
-          <a:lstStyle/>
-          <a:p>
-            <a:pPr indent="0" marL="0">
-              <a:buNone/>
-            </a:pPr>
-            <a:r>
-              <a:rPr lang="en-US" sz="20000" dirty="0">
-                <a:solidFill>
-                  <a:srgbClr val="A3C1AD"/>
-                </a:solidFill>
-                <a:latin typeface="Georgia" pitchFamily="34" charset="0"/>
-                <a:ea typeface="Georgia" pitchFamily="34" charset="-122"/>
-                <a:cs typeface="Georgia" pitchFamily="34" charset="-120"/>
-              </a:rPr>
-              <a:t>“</a:t>
-            </a:r>
-            <a:endParaRPr lang="en-US" sz="20000" dirty="0"/>
+            <a:off x="822960" y="1554480"/>
+            <a:ext cx="7315200" cy="274320"/>
+          </a:xfrm>
+          <a:prstGeom prst="rect">
+            <a:avLst/>
+          </a:prstGeom>
+          <a:noFill/>
+          <a:ln/>
+        </p:spPr>
+        <p:txBody>
+          <a:bodyPr wrap="square" lIns="0" tIns="0" rIns="0" bIns="0" rtlCol="0" anchor="ctr"/>
+          <a:lstStyle/>
+          <a:p>
+            <a:pPr algn="l" indent="0" marL="0">
+              <a:buNone/>
+            </a:pPr>
+            <a:r>
+              <a:rPr lang="en-US" sz="1100" b="1" spc="250" kern="0" dirty="0">
+                <a:solidFill>
+                  <a:srgbClr val="4A6B5D"/>
+                </a:solidFill>
+                <a:latin typeface="Arial" pitchFamily="34" charset="0"/>
+                <a:ea typeface="Arial" pitchFamily="34" charset="-122"/>
+                <a:cs typeface="Arial" pitchFamily="34" charset="-120"/>
+              </a:rPr>
+              <a:t>LEAVING WITH IT IN WRITING</a:t>
+            </a:r>
+            <a:endParaRPr lang="en-US" sz="1100" dirty="0"/>
           </a:p>
         </p:txBody>
       </p:sp>
@@ -5176,7 +6687,7 @@
         </p:nvSpPr>
         <p:spPr>
           <a:xfrm>
-            <a:off x="822960" y="1920240"/>
+            <a:off x="822960" y="2103120"/>
             <a:ext cx="10424160" cy="2194560"/>
           </a:xfrm>
           <a:prstGeom prst="rect">

--- a/content/decks/media-studies/media-studies-s1-lesson-18-exam-rehearsal.pptx
+++ b/content/decks/media-studies/media-studies-s1-lesson-18-exam-rehearsal.pptx
@@ -2506,7 +2506,7 @@
                 <a:ea typeface="Georgia" pitchFamily="34" charset="-122"/>
                 <a:cs typeface="Georgia" pitchFamily="34" charset="-120"/>
               </a:rPr>
-              <a:t>Tilt up equals focus on Adam. Low angle equals who has the power. Every line of the examiners' reading pairs a technique with what it does. Your 'so that' clause is this page in miniature; write like the people who mark you.</a:t>
+              <a:t>Every line pairs a technique with its effect. Tilt up: focus on Adam. Low angle: who has power. Copy this shape in your own sentences. Write like the people who mark you.</a:t>
             </a:r>
             <a:endParaRPr lang="en-US" sz="1450" dirty="0"/>
           </a:p>
@@ -2954,23 +2954,43 @@
         <p:spPr>
           <a:xfrm>
             <a:off x="822960" y="5943600"/>
-            <a:ext cx="10543032" cy="411480"/>
-          </a:xfrm>
-          <a:prstGeom prst="rect">
-            <a:avLst/>
-          </a:prstGeom>
-          <a:noFill/>
-          <a:ln/>
-        </p:spPr>
-        <p:txBody>
-          <a:bodyPr wrap="square" lIns="0" tIns="0" rIns="0" bIns="0" rtlCol="0" anchor="ctr"/>
+            <a:ext cx="10543032" cy="320040"/>
+          </a:xfrm>
+          <a:prstGeom prst="rect">
+            <a:avLst/>
+          </a:prstGeom>
+          <a:noFill/>
+          <a:ln/>
+        </p:spPr>
+        <p:txBody>
+          <a:bodyPr wrap="square" lIns="0" tIns="0" rIns="0" bIns="0" rtlCol="0" anchor="t"/>
           <a:lstStyle/>
           <a:p>
             <a:pPr indent="0" marL="0">
-              <a:buNone/>
-            </a:pPr>
-            <a:r>
-              <a:rPr lang="en-US" sz="1350" i="1" dirty="0">
+              <a:lnSpc>
+                <a:spcPts val="1700"/>
+              </a:lnSpc>
+              <a:buNone/>
+            </a:pPr>
+            <a:r>
+              <a:rPr lang="en-US" sz="1100" b="1" spc="100" kern="0" dirty="0">
+                <a:solidFill>
+                  <a:srgbClr val="4A6B5D"/>
+                </a:solidFill>
+                <a:latin typeface="Arial" pitchFamily="34" charset="0"/>
+                <a:ea typeface="Arial" pitchFamily="34" charset="-122"/>
+                <a:cs typeface="Arial" pitchFamily="34" charset="-120"/>
+              </a:rPr>
+              <a:t>KEY POINT   </a:t>
+            </a:r>
+            <a:pPr indent="0" marL="0">
+              <a:lnSpc>
+                <a:spcPts val="1700"/>
+              </a:lnSpc>
+              <a:buNone/>
+            </a:pPr>
+            <a:r>
+              <a:rPr lang="en-US" sz="1300" i="1" dirty="0">
                 <a:solidFill>
                   <a:srgbClr val="4A6B5D"/>
                 </a:solidFill>
@@ -2978,9 +2998,9 @@
                 <a:ea typeface="Georgia" pitchFamily="34" charset="-122"/>
                 <a:cs typeface="Georgia" pitchFamily="34" charset="-120"/>
               </a:rPr>
-              <a:t>An essay is not marked by different rules, only in different words. Anyone who assumes Section B is a free-form essay gives away the same five criteria twice.</a:t>
-            </a:r>
-            <a:endParaRPr lang="en-US" sz="1350" dirty="0"/>
+              <a:t>Section B uses the same five criteria, in different words. Treat it as a free essay and you give the marks away twice.</a:t>
+            </a:r>
+            <a:endParaRPr lang="en-US" sz="1100" dirty="0"/>
           </a:p>
         </p:txBody>
       </p:sp>
@@ -3308,6 +3328,23 @@
               <a:buNone/>
             </a:pPr>
             <a:r>
+              <a:rPr lang="en-US" sz="1600" b="1" spc="100" kern="0" dirty="0">
+                <a:solidFill>
+                  <a:srgbClr val="4A6B5D"/>
+                </a:solidFill>
+                <a:latin typeface="Arial" pitchFamily="34" charset="0"/>
+                <a:ea typeface="Arial" pitchFamily="34" charset="-122"/>
+                <a:cs typeface="Arial" pitchFamily="34" charset="-120"/>
+              </a:rPr>
+              <a:t>FORMAT   </a:t>
+            </a:r>
+            <a:pPr indent="0" marL="0">
+              <a:lnSpc>
+                <a:spcPts val="2500"/>
+              </a:lnSpc>
+              <a:buNone/>
+            </a:pPr>
+            <a:r>
               <a:rPr lang="en-US" sz="1800" dirty="0">
                 <a:solidFill>
                   <a:srgbClr val="24313F"/>
@@ -3316,9 +3353,83 @@
                 <a:ea typeface="Georgia" pitchFamily="34" charset="-122"/>
                 <a:cs typeface="Georgia" pitchFamily="34" charset="-120"/>
               </a:rPr>
-              <a:t>A 45-minute Section B on your own case studies, peer-marked as Beat the Examiner, full dress: the official rubric, then live moderation. The last teaching day ends on the success check, stated from memory: the full paper structure and the per-section minute budget. Then logistics, once, calmly: bring nothing but pens.</a:t>
-            </a:r>
-            <a:endParaRPr lang="en-US" sz="1800" dirty="0"/>
+              <a:t>A 45-minute Section B on your own case studies. Peer-marked with the official rubric, then moderated live.</a:t>
+            </a:r>
+            <a:endParaRPr lang="en-US" sz="1600" dirty="0"/>
+          </a:p>
+          <a:p>
+            <a:pPr indent="0" marL="0">
+              <a:lnSpc>
+                <a:spcPts val="2500"/>
+              </a:lnSpc>
+              <a:buNone/>
+            </a:pPr>
+            <a:r>
+              <a:rPr lang="en-US" sz="1600" b="1" spc="100" kern="0" dirty="0">
+                <a:solidFill>
+                  <a:srgbClr val="4A6B5D"/>
+                </a:solidFill>
+                <a:latin typeface="Arial" pitchFamily="34" charset="0"/>
+                <a:ea typeface="Arial" pitchFamily="34" charset="-122"/>
+                <a:cs typeface="Arial" pitchFamily="34" charset="-120"/>
+              </a:rPr>
+              <a:t>FRIDAY   </a:t>
+            </a:r>
+            <a:pPr indent="0" marL="0">
+              <a:lnSpc>
+                <a:spcPts val="2500"/>
+              </a:lnSpc>
+              <a:buNone/>
+            </a:pPr>
+            <a:r>
+              <a:rPr lang="en-US" sz="1800" dirty="0">
+                <a:solidFill>
+                  <a:srgbClr val="24313F"/>
+                </a:solidFill>
+                <a:latin typeface="Georgia" pitchFamily="34" charset="0"/>
+                <a:ea typeface="Georgia" pitchFamily="34" charset="-122"/>
+                <a:cs typeface="Georgia" pitchFamily="34" charset="-120"/>
+              </a:rPr>
+              <a:t>Say the success check from memory: the full paper structure and your per-section minute budget.</a:t>
+            </a:r>
+            <a:endParaRPr lang="en-US" sz="1600" dirty="0"/>
+          </a:p>
+          <a:p>
+            <a:pPr indent="0" marL="0">
+              <a:lnSpc>
+                <a:spcPts val="2500"/>
+              </a:lnSpc>
+              <a:buNone/>
+            </a:pPr>
+            <a:r>
+              <a:rPr lang="en-US" sz="1600" b="1" spc="100" kern="0" dirty="0">
+                <a:solidFill>
+                  <a:srgbClr val="4A6B5D"/>
+                </a:solidFill>
+                <a:latin typeface="Arial" pitchFamily="34" charset="0"/>
+                <a:ea typeface="Arial" pitchFamily="34" charset="-122"/>
+                <a:cs typeface="Arial" pitchFamily="34" charset="-120"/>
+              </a:rPr>
+              <a:t>LOGISTICS   </a:t>
+            </a:r>
+            <a:pPr indent="0" marL="0">
+              <a:lnSpc>
+                <a:spcPts val="2500"/>
+              </a:lnSpc>
+              <a:buNone/>
+            </a:pPr>
+            <a:r>
+              <a:rPr lang="en-US" sz="1800" dirty="0">
+                <a:solidFill>
+                  <a:srgbClr val="24313F"/>
+                </a:solidFill>
+                <a:latin typeface="Georgia" pitchFamily="34" charset="0"/>
+                <a:ea typeface="Georgia" pitchFamily="34" charset="-122"/>
+                <a:cs typeface="Georgia" pitchFamily="34" charset="-120"/>
+              </a:rPr>
+              <a:t>Once, calmly: bring nothing but pens.</a:t>
+            </a:r>
+            <a:endParaRPr lang="en-US" sz="1600" dirty="0"/>
           </a:p>
         </p:txBody>
       </p:sp>
@@ -4629,6 +4740,65 @@
           </a:p>
         </p:txBody>
       </p:sp>
+      <p:sp>
+        <p:nvSpPr>
+          <p:cNvPr id="6" name="Text 4"/>
+          <p:cNvSpPr/>
+          <p:nvPr/>
+        </p:nvSpPr>
+        <p:spPr>
+          <a:xfrm>
+            <a:off x="822960" y="5806440"/>
+            <a:ext cx="10424160" cy="640080"/>
+          </a:xfrm>
+          <a:prstGeom prst="rect">
+            <a:avLst/>
+          </a:prstGeom>
+          <a:noFill/>
+          <a:ln/>
+        </p:spPr>
+        <p:txBody>
+          <a:bodyPr wrap="square" lIns="0" tIns="0" rIns="0" bIns="0" rtlCol="0" anchor="t"/>
+          <a:lstStyle/>
+          <a:p>
+            <a:pPr indent="0" marL="0">
+              <a:lnSpc>
+                <a:spcPts val="1900"/>
+              </a:lnSpc>
+              <a:buNone/>
+            </a:pPr>
+            <a:r>
+              <a:rPr lang="en-US" sz="1200" b="1" spc="100" kern="0" dirty="0">
+                <a:solidFill>
+                  <a:srgbClr val="7A7F72"/>
+                </a:solidFill>
+                <a:latin typeface="Arial" pitchFamily="34" charset="0"/>
+                <a:ea typeface="Arial" pitchFamily="34" charset="-122"/>
+                <a:cs typeface="Arial" pitchFamily="34" charset="-120"/>
+              </a:rPr>
+              <a:t>IN PLAIN WORDS   </a:t>
+            </a:r>
+            <a:pPr indent="0" marL="0">
+              <a:lnSpc>
+                <a:spcPts val="1900"/>
+              </a:lnSpc>
+              <a:buNone/>
+            </a:pPr>
+            <a:r>
+              <a:rPr lang="en-US" sz="1400" i="1" dirty="0">
+                <a:solidFill>
+                  <a:srgbClr val="4A6B5D"/>
+                </a:solidFill>
+                <a:latin typeface="Georgia" pitchFamily="34" charset="0"/>
+                <a:ea typeface="Georgia" pitchFamily="34" charset="-122"/>
+                <a:cs typeface="Georgia" pitchFamily="34" charset="-120"/>
+              </a:rPr>
+              <a:t>You become what you practice. Practice the exam until doing it well is normal.</a:t>
+            </a:r>
+            <a:endParaRPr lang="en-US" sz="1200" dirty="0"/>
+          </a:p>
+        </p:txBody>
+      </p:sp>
     </p:spTree>
   </p:cSld>
   <p:clrMapOvr>
@@ -5502,12 +5672,29 @@
           <a:p>
             <a:pPr indent="0" marL="0">
               <a:lnSpc>
-                <a:spcPts val="2800"/>
+                <a:spcPts val="2700"/>
               </a:lnSpc>
               <a:buNone/>
             </a:pPr>
             <a:r>
-              <a:rPr lang="en-US" sz="2000" dirty="0">
+              <a:rPr lang="en-US" sz="1700" b="1" spc="100" kern="0" dirty="0">
+                <a:solidFill>
+                  <a:srgbClr val="4A6B5D"/>
+                </a:solidFill>
+                <a:latin typeface="Arial" pitchFamily="34" charset="0"/>
+                <a:ea typeface="Arial" pitchFamily="34" charset="-122"/>
+                <a:cs typeface="Arial" pitchFamily="34" charset="-120"/>
+              </a:rPr>
+              <a:t>DRILL   </a:t>
+            </a:r>
+            <a:pPr indent="0" marL="0">
+              <a:lnSpc>
+                <a:spcPts val="2700"/>
+              </a:lnSpc>
+              <a:buNone/>
+            </a:pPr>
+            <a:r>
+              <a:rPr lang="en-US" sz="1900" dirty="0">
                 <a:solidFill>
                   <a:srgbClr val="24313F"/>
                 </a:solidFill>
@@ -5515,9 +5702,83 @@
                 <a:ea typeface="Georgia" pitchFamily="34" charset="-122"/>
                 <a:cs typeface="Georgia" pitchFamily="34" charset="-120"/>
               </a:rPr>
-              <a:t>Three rounds of five-minute Section B plans: read the question, plan claim, evidence, counter, response, plus the case-study facts, and stop at five minutes exactly. Round by round the plans get denser and calmer, and that is the drill working. Then swap: could you write this stranger's essay from their plan? If not, what is missing is what the examiner would miss too.</a:t>
-            </a:r>
-            <a:endParaRPr lang="en-US" sz="2000" dirty="0"/>
+              <a:t>Three rounds. Read the question, plan the four moves plus your case-study facts, stop at five minutes exactly.</a:t>
+            </a:r>
+            <a:endParaRPr lang="en-US" sz="1700" dirty="0"/>
+          </a:p>
+          <a:p>
+            <a:pPr indent="0" marL="0">
+              <a:lnSpc>
+                <a:spcPts val="2700"/>
+              </a:lnSpc>
+              <a:buNone/>
+            </a:pPr>
+            <a:r>
+              <a:rPr lang="en-US" sz="1700" b="1" spc="100" kern="0" dirty="0">
+                <a:solidFill>
+                  <a:srgbClr val="4A6B5D"/>
+                </a:solidFill>
+                <a:latin typeface="Arial" pitchFamily="34" charset="0"/>
+                <a:ea typeface="Arial" pitchFamily="34" charset="-122"/>
+                <a:cs typeface="Arial" pitchFamily="34" charset="-120"/>
+              </a:rPr>
+              <a:t>WHY   </a:t>
+            </a:r>
+            <a:pPr indent="0" marL="0">
+              <a:lnSpc>
+                <a:spcPts val="2700"/>
+              </a:lnSpc>
+              <a:buNone/>
+            </a:pPr>
+            <a:r>
+              <a:rPr lang="en-US" sz="1900" dirty="0">
+                <a:solidFill>
+                  <a:srgbClr val="24313F"/>
+                </a:solidFill>
+                <a:latin typeface="Georgia" pitchFamily="34" charset="0"/>
+                <a:ea typeface="Georgia" pitchFamily="34" charset="-122"/>
+                <a:cs typeface="Georgia" pitchFamily="34" charset="-120"/>
+              </a:rPr>
+              <a:t>Round by round, the plans get denser and calmer. That is the drill working.</a:t>
+            </a:r>
+            <a:endParaRPr lang="en-US" sz="1700" dirty="0"/>
+          </a:p>
+          <a:p>
+            <a:pPr indent="0" marL="0">
+              <a:lnSpc>
+                <a:spcPts val="2700"/>
+              </a:lnSpc>
+              <a:buNone/>
+            </a:pPr>
+            <a:r>
+              <a:rPr lang="en-US" sz="1700" b="1" spc="100" kern="0" dirty="0">
+                <a:solidFill>
+                  <a:srgbClr val="4A6B5D"/>
+                </a:solidFill>
+                <a:latin typeface="Arial" pitchFamily="34" charset="0"/>
+                <a:ea typeface="Arial" pitchFamily="34" charset="-122"/>
+                <a:cs typeface="Arial" pitchFamily="34" charset="-120"/>
+              </a:rPr>
+              <a:t>SWAP TEST   </a:t>
+            </a:r>
+            <a:pPr indent="0" marL="0">
+              <a:lnSpc>
+                <a:spcPts val="2700"/>
+              </a:lnSpc>
+              <a:buNone/>
+            </a:pPr>
+            <a:r>
+              <a:rPr lang="en-US" sz="1900" dirty="0">
+                <a:solidFill>
+                  <a:srgbClr val="24313F"/>
+                </a:solidFill>
+                <a:latin typeface="Georgia" pitchFamily="34" charset="0"/>
+                <a:ea typeface="Georgia" pitchFamily="34" charset="-122"/>
+                <a:cs typeface="Georgia" pitchFamily="34" charset="-120"/>
+              </a:rPr>
+              <a:t>Could a stranger write the essay from your plan? What they cannot see, the examiner will miss too.</a:t>
+            </a:r>
+            <a:endParaRPr lang="en-US" sz="1700" dirty="0"/>
           </a:p>
         </p:txBody>
       </p:sp>
@@ -5840,12 +6101,29 @@
           <a:p>
             <a:pPr indent="0" marL="0">
               <a:lnSpc>
-                <a:spcPts val="2400"/>
+                <a:spcPts val="2300"/>
               </a:lnSpc>
               <a:buNone/>
             </a:pPr>
             <a:r>
-              <a:rPr lang="en-US" sz="1700" dirty="0">
+              <a:rPr lang="en-US" sz="1400" b="1" spc="100" kern="0" dirty="0">
+                <a:solidFill>
+                  <a:srgbClr val="4A6B5D"/>
+                </a:solidFill>
+                <a:latin typeface="Arial" pitchFamily="34" charset="0"/>
+                <a:ea typeface="Arial" pitchFamily="34" charset="-122"/>
+                <a:cs typeface="Arial" pitchFamily="34" charset="-120"/>
+              </a:rPr>
+              <a:t>TASK   </a:t>
+            </a:r>
+            <a:pPr indent="0" marL="0">
+              <a:lnSpc>
+                <a:spcPts val="2300"/>
+              </a:lnSpc>
+              <a:buNone/>
+            </a:pPr>
+            <a:r>
+              <a:rPr lang="en-US" sz="1600" dirty="0">
                 <a:solidFill>
                   <a:srgbClr val="24313F"/>
                 </a:solidFill>
@@ -5853,9 +6131,83 @@
                 <a:ea typeface="Georgia" pitchFamily="34" charset="-122"/>
                 <a:cs typeface="Georgia" pitchFamily="34" charset="-120"/>
               </a:rPr>
-              <a:t>Beat the Examiner, full dress. A full Section B, timed exactly, on your own case studies. Then every student marks a peer's script against the official five-criteria rubric, band words and all; the closest banding to the moderated mark takes the round. The teacher moderates three scripts aloud, showing where the peer marks drifted.</a:t>
-            </a:r>
-            <a:endParaRPr lang="en-US" sz="1700" dirty="0"/>
+              <a:t>A full Section B, timed exactly, on your own case studies.</a:t>
+            </a:r>
+            <a:endParaRPr lang="en-US" sz="1400" dirty="0"/>
+          </a:p>
+          <a:p>
+            <a:pPr indent="0" marL="0">
+              <a:lnSpc>
+                <a:spcPts val="2300"/>
+              </a:lnSpc>
+              <a:buNone/>
+            </a:pPr>
+            <a:r>
+              <a:rPr lang="en-US" sz="1400" b="1" spc="100" kern="0" dirty="0">
+                <a:solidFill>
+                  <a:srgbClr val="4A6B5D"/>
+                </a:solidFill>
+                <a:latin typeface="Arial" pitchFamily="34" charset="0"/>
+                <a:ea typeface="Arial" pitchFamily="34" charset="-122"/>
+                <a:cs typeface="Arial" pitchFamily="34" charset="-120"/>
+              </a:rPr>
+              <a:t>THEN   </a:t>
+            </a:r>
+            <a:pPr indent="0" marL="0">
+              <a:lnSpc>
+                <a:spcPts val="2300"/>
+              </a:lnSpc>
+              <a:buNone/>
+            </a:pPr>
+            <a:r>
+              <a:rPr lang="en-US" sz="1600" dirty="0">
+                <a:solidFill>
+                  <a:srgbClr val="24313F"/>
+                </a:solidFill>
+                <a:latin typeface="Georgia" pitchFamily="34" charset="0"/>
+                <a:ea typeface="Georgia" pitchFamily="34" charset="-122"/>
+                <a:cs typeface="Georgia" pitchFamily="34" charset="-120"/>
+              </a:rPr>
+              <a:t>Mark a peer's script with the official rubric, band words and all. Closest banding to the moderated mark wins the round.</a:t>
+            </a:r>
+            <a:endParaRPr lang="en-US" sz="1400" dirty="0"/>
+          </a:p>
+          <a:p>
+            <a:pPr indent="0" marL="0">
+              <a:lnSpc>
+                <a:spcPts val="2300"/>
+              </a:lnSpc>
+              <a:buNone/>
+            </a:pPr>
+            <a:r>
+              <a:rPr lang="en-US" sz="1400" b="1" spc="100" kern="0" dirty="0">
+                <a:solidFill>
+                  <a:srgbClr val="4A6B5D"/>
+                </a:solidFill>
+                <a:latin typeface="Arial" pitchFamily="34" charset="0"/>
+                <a:ea typeface="Arial" pitchFamily="34" charset="-122"/>
+                <a:cs typeface="Arial" pitchFamily="34" charset="-120"/>
+              </a:rPr>
+              <a:t>MODERATION   </a:t>
+            </a:r>
+            <a:pPr indent="0" marL="0">
+              <a:lnSpc>
+                <a:spcPts val="2300"/>
+              </a:lnSpc>
+              <a:buNone/>
+            </a:pPr>
+            <a:r>
+              <a:rPr lang="en-US" sz="1600" dirty="0">
+                <a:solidFill>
+                  <a:srgbClr val="24313F"/>
+                </a:solidFill>
+                <a:latin typeface="Georgia" pitchFamily="34" charset="0"/>
+                <a:ea typeface="Georgia" pitchFamily="34" charset="-122"/>
+                <a:cs typeface="Georgia" pitchFamily="34" charset="-120"/>
+              </a:rPr>
+              <a:t>The teacher moderates three scripts aloud, showing where peer marks drifted.</a:t>
+            </a:r>
+            <a:endParaRPr lang="en-US" sz="1400" dirty="0"/>
           </a:p>
         </p:txBody>
       </p:sp>
@@ -6488,12 +6840,29 @@
           <a:p>
             <a:pPr indent="0" marL="0">
               <a:lnSpc>
-                <a:spcPts val="1900"/>
+                <a:spcPts val="1800"/>
               </a:lnSpc>
               <a:buNone/>
             </a:pPr>
             <a:r>
-              <a:rPr lang="en-US" sz="1400" i="1" dirty="0">
+              <a:rPr lang="en-US" sz="1150" b="1" spc="100" kern="0" dirty="0">
+                <a:solidFill>
+                  <a:srgbClr val="4A6B5D"/>
+                </a:solidFill>
+                <a:latin typeface="Arial" pitchFamily="34" charset="0"/>
+                <a:ea typeface="Arial" pitchFamily="34" charset="-122"/>
+                <a:cs typeface="Arial" pitchFamily="34" charset="-120"/>
+              </a:rPr>
+              <a:t>READ IT   </a:t>
+            </a:r>
+            <a:pPr indent="0" marL="0">
+              <a:lnSpc>
+                <a:spcPts val="1800"/>
+              </a:lnSpc>
+              <a:buNone/>
+            </a:pPr>
+            <a:r>
+              <a:rPr lang="en-US" sz="1350" dirty="0">
                 <a:solidFill>
                   <a:srgbClr val="24313F"/>
                 </a:solidFill>
@@ -6501,9 +6870,46 @@
                 <a:ea typeface="Georgia" pitchFamily="34" charset="-122"/>
                 <a:cs typeface="Georgia" pitchFamily="34" charset="-120"/>
               </a:rPr>
-              <a:t>The same split in the scheme's own header: AO1 15 marks, AO2 10, five criteria of five. Map it against your CS13 result: which criteria the room feeds naturally, which it starves.</a:t>
-            </a:r>
-            <a:endParaRPr lang="en-US" sz="1400" dirty="0"/>
+              <a:t>The scheme's own header: AO1 15 marks, AO2 10. Five criteria, five marks each.</a:t>
+            </a:r>
+            <a:endParaRPr lang="en-US" sz="1150" dirty="0"/>
+          </a:p>
+          <a:p>
+            <a:pPr indent="0" marL="0">
+              <a:lnSpc>
+                <a:spcPts val="1800"/>
+              </a:lnSpc>
+              <a:buNone/>
+            </a:pPr>
+            <a:r>
+              <a:rPr lang="en-US" sz="1150" b="1" spc="100" kern="0" dirty="0">
+                <a:solidFill>
+                  <a:srgbClr val="4A6B5D"/>
+                </a:solidFill>
+                <a:latin typeface="Arial" pitchFamily="34" charset="0"/>
+                <a:ea typeface="Arial" pitchFamily="34" charset="-122"/>
+                <a:cs typeface="Arial" pitchFamily="34" charset="-120"/>
+              </a:rPr>
+              <a:t>TASK   </a:t>
+            </a:r>
+            <a:pPr indent="0" marL="0">
+              <a:lnSpc>
+                <a:spcPts val="1800"/>
+              </a:lnSpc>
+              <a:buNone/>
+            </a:pPr>
+            <a:r>
+              <a:rPr lang="en-US" sz="1350" dirty="0">
+                <a:solidFill>
+                  <a:srgbClr val="24313F"/>
+                </a:solidFill>
+                <a:latin typeface="Georgia" pitchFamily="34" charset="0"/>
+                <a:ea typeface="Georgia" pitchFamily="34" charset="-122"/>
+                <a:cs typeface="Georgia" pitchFamily="34" charset="-120"/>
+              </a:rPr>
+              <a:t>Map it against your CS13 result: which criteria do you feed? Which do you starve?</a:t>
+            </a:r>
+            <a:endParaRPr lang="en-US" sz="1150" dirty="0"/>
           </a:p>
         </p:txBody>
       </p:sp>

--- a/content/decks/media-studies/media-studies-s1-lesson-18-exam-rehearsal.pptx
+++ b/content/decks/media-studies/media-studies-s1-lesson-18-exam-rehearsal.pptx
@@ -514,7 +514,7 @@
           <a:p>
             <a:r>
               <a:rPr lang="en-US" dirty="0"/>
-              <a:t>The last teaching week is spent making the exam boring: no surprises left in format, timing, or the mark scheme's economics. No Thursday session.</a:t>
+              <a:t>The last teaching week is spent making the exam boring: no surprises left in format, timing, or the mark scheme's economics. No Tuesday session; Thursday carries round three and the compare.</a:t>
             </a:r>
             <a:endParaRPr lang="en-US" dirty="0"/>
           </a:p>
@@ -2178,7 +2178,7 @@
                 <a:ea typeface="Arial" pitchFamily="34" charset="-122"/>
                 <a:cs typeface="Arial" pitchFamily="34" charset="-120"/>
               </a:rPr>
-              <a:t>Four days  ·  Mon 4 · Tue 5 · Wed 6 (double) · Fri 8 January</a:t>
+              <a:t>Four days  ·  Mon 4 · Wed 6 (double) · Thu 7 · Fri 8 January</a:t>
             </a:r>
             <a:endParaRPr lang="en-US" sz="1300" dirty="0"/>
           </a:p>
